--- a/Y9_Exploring_Science/9B_Plant_growth/9B_L03_Gas_exchange_in_leaves.pptx
+++ b/Y9_Exploring_Science/9B_Plant_growth/9B_L03_Gas_exchange_in_leaves.pptx
@@ -1918,7 +1918,7 @@
         <p:spPr>
           <a:xfrm>
             <a:off x="548640" y="3657600"/>
-            <a:ext cx="10515600" cy="914400"/>
+            <a:ext cx="10515600" cy="1097280"/>
           </a:xfrm>
           <a:prstGeom prst="rect">
             <a:avLst/>
@@ -1931,7 +1931,7 @@
           <a:lstStyle>
             <a:lvl1pPr indent="0" marL="0">
               <a:buNone/>
-              <a:defRPr lang="en-US" sz="2000" dirty="0">
+              <a:defRPr lang="en-US" sz="2400" dirty="0">
                 <a:solidFill>
                   <a:srgbClr val="FFFFFF"/>
                 </a:solidFill>
@@ -1942,7 +1942,7 @@
             <a:pPr indent="0" marL="0">
               <a:buNone/>
             </a:pPr>
-            <a:endParaRPr lang="en-US" sz="2000" dirty="0"/>
+            <a:endParaRPr lang="en-US" sz="2400" dirty="0"/>
           </a:p>
         </p:txBody>
       </p:sp>
@@ -2042,14 +2042,14 @@
               <a:buNone/>
             </a:pPr>
             <a:r>
-              <a:rPr lang="en-US" sz="900" dirty="0">
+              <a:rPr lang="en-US" sz="1000" dirty="0">
                 <a:solidFill>
                   <a:srgbClr val="5B6574"/>
                 </a:solidFill>
               </a:rPr>
               <a:t>Year 9 Science  |  9B Plant growth  |  Lesson 3: Gas exchange in leaves</a:t>
             </a:r>
-            <a:endParaRPr lang="en-US" sz="900" dirty="0"/>
+            <a:endParaRPr lang="en-US" sz="1000" dirty="0"/>
           </a:p>
         </p:txBody>
       </p:sp>
@@ -2218,14 +2218,14 @@
               <a:buNone/>
             </a:pPr>
             <a:r>
-              <a:rPr lang="en-US" sz="900" dirty="0">
+              <a:rPr lang="en-US" sz="1000" dirty="0">
                 <a:solidFill>
                   <a:srgbClr val="5B6574"/>
                 </a:solidFill>
               </a:rPr>
               <a:t>Year 9 Science  |  9B Plant growth  |  Lesson 3: Gas exchange in leaves</a:t>
             </a:r>
-            <a:endParaRPr lang="en-US" sz="900" dirty="0"/>
+            <a:endParaRPr lang="en-US" sz="1000" dirty="0"/>
           </a:p>
         </p:txBody>
       </p:sp>
@@ -2394,14 +2394,14 @@
               <a:buNone/>
             </a:pPr>
             <a:r>
-              <a:rPr lang="en-US" sz="900" dirty="0">
+              <a:rPr lang="en-US" sz="1000" dirty="0">
                 <a:solidFill>
                   <a:srgbClr val="5B6574"/>
                 </a:solidFill>
               </a:rPr>
               <a:t>Year 9 Science  |  9B Plant growth  |  Lesson 3: Gas exchange in leaves</a:t>
             </a:r>
-            <a:endParaRPr lang="en-US" sz="900" dirty="0"/>
+            <a:endParaRPr lang="en-US" sz="1000" dirty="0"/>
           </a:p>
         </p:txBody>
       </p:sp>
@@ -2530,7 +2530,7 @@
           <a:lstStyle>
             <a:lvl1pPr indent="0" marL="0">
               <a:buNone/>
-              <a:defRPr lang="en-US" sz="3000" b="1" dirty="0">
+              <a:defRPr lang="en-US" sz="3400" b="1" dirty="0">
                 <a:solidFill>
                   <a:srgbClr val="3A2E00"/>
                 </a:solidFill>
@@ -2541,7 +2541,7 @@
             <a:pPr indent="0" marL="0">
               <a:buNone/>
             </a:pPr>
-            <a:endParaRPr lang="en-US" sz="3000" dirty="0"/>
+            <a:endParaRPr lang="en-US" sz="3400" dirty="0"/>
           </a:p>
         </p:txBody>
       </p:sp>
@@ -2958,14 +2958,14 @@
               <a:buNone/>
             </a:pPr>
             <a:r>
-              <a:rPr lang="en-US" sz="1300" b="1" spc="200" kern="0" dirty="0">
+              <a:rPr lang="en-US" sz="1400" b="1" spc="200" kern="0" dirty="0">
                 <a:solidFill>
                   <a:srgbClr val="F2CE3E"/>
                 </a:solidFill>
               </a:rPr>
               <a:t>YEAR 9 SCIENCE  ·  9B PLANT GROWTH  ·  LESSON 3 OF 7</a:t>
             </a:r>
-            <a:endParaRPr lang="en-US" sz="1300" dirty="0"/>
+            <a:endParaRPr lang="en-US" sz="1400" dirty="0"/>
           </a:p>
         </p:txBody>
       </p:sp>
@@ -3018,7 +3018,7 @@
         <p:spPr>
           <a:xfrm>
             <a:off x="548640" y="3657600"/>
-            <a:ext cx="10515600" cy="914400"/>
+            <a:ext cx="10515600" cy="1097280"/>
           </a:xfrm>
           <a:prstGeom prst="rect">
             <a:avLst/>
@@ -3034,14 +3034,14 @@
               <a:buNone/>
             </a:pPr>
             <a:r>
-              <a:rPr lang="en-US" sz="2000" dirty="0">
+              <a:rPr lang="en-US" sz="2400" dirty="0">
                 <a:solidFill>
                   <a:srgbClr val="FFFFFF"/>
                 </a:solidFill>
               </a:rPr>
               <a:t>A leaf has thousands of tiny doors. Who opens them, and what goes in and out?</a:t>
             </a:r>
-            <a:endParaRPr lang="en-US" sz="2000" dirty="0"/>
+            <a:endParaRPr lang="en-US" sz="2400" dirty="0"/>
           </a:p>
         </p:txBody>
       </p:sp>
@@ -3070,14 +3070,14 @@
               <a:buNone/>
             </a:pPr>
             <a:r>
-              <a:rPr lang="en-US" sz="1200" dirty="0">
+              <a:rPr lang="en-US" sz="1400" dirty="0">
                 <a:solidFill>
                   <a:srgbClr val="C9D3E6"/>
                 </a:solidFill>
               </a:rPr>
               <a:t>Exploring Science International 9  ·  Student Book pages 25  ·  Workbook pages 18</a:t>
             </a:r>
-            <a:endParaRPr lang="en-US" sz="1200" dirty="0"/>
+            <a:endParaRPr lang="en-US" sz="1400" dirty="0"/>
           </a:p>
         </p:txBody>
       </p:sp>
@@ -3157,14 +3157,14 @@
               <a:buNone/>
             </a:pPr>
             <a:r>
-              <a:rPr lang="en-US" sz="3000" b="1" dirty="0">
+              <a:rPr lang="en-US" sz="3400" b="1" dirty="0">
                 <a:solidFill>
                   <a:srgbClr val="3A2E00"/>
                 </a:solidFill>
               </a:rPr>
               <a:t>Safety: nail varnish peel</a:t>
             </a:r>
-            <a:endParaRPr lang="en-US" sz="3000" dirty="0"/>
+            <a:endParaRPr lang="en-US" sz="3400" dirty="0"/>
           </a:p>
         </p:txBody>
       </p:sp>
@@ -3252,94 +3252,94 @@
           <a:bodyPr wrap="square" lIns="0" tIns="0" rIns="0" bIns="0" rtlCol="0" anchor="t"/>
           <a:lstStyle/>
           <a:p>
-            <a:pPr marL="228600" indent="-228600">
+            <a:pPr marL="304800" indent="-304800">
               <a:spcAft>
-                <a:spcPts val="600"/>
+                <a:spcPts val="800"/>
               </a:spcAft>
               <a:buSzPct val="100000"/>
               <a:buChar char="•"/>
             </a:pPr>
             <a:r>
-              <a:rPr lang="en-US" sz="2000" dirty="0">
+              <a:rPr lang="en-US" sz="2600" dirty="0">
                 <a:solidFill>
                   <a:srgbClr val="3A2E00"/>
                 </a:solidFill>
               </a:rPr>
               <a:t>Clear nail varnish gives off fumes: keep the lid on when not in use and keep it away from any flame.</a:t>
             </a:r>
-            <a:endParaRPr lang="en-US" sz="2000" dirty="0"/>
-          </a:p>
-          <a:p>
-            <a:pPr marL="228600" indent="-228600">
+            <a:endParaRPr lang="en-US" sz="2600" dirty="0"/>
+          </a:p>
+          <a:p>
+            <a:pPr marL="304800" indent="-304800">
               <a:spcAft>
-                <a:spcPts val="600"/>
+                <a:spcPts val="800"/>
               </a:spcAft>
               <a:buSzPct val="100000"/>
               <a:buChar char="•"/>
             </a:pPr>
             <a:r>
-              <a:rPr lang="en-US" sz="2000" dirty="0">
+              <a:rPr lang="en-US" sz="2600" dirty="0">
                 <a:solidFill>
                   <a:srgbClr val="3A2E00"/>
                 </a:solidFill>
               </a:rPr>
               <a:t>Do not sniff the varnish. Open a window if the room smells strongly.</a:t>
             </a:r>
-            <a:endParaRPr lang="en-US" sz="2000" dirty="0"/>
-          </a:p>
-          <a:p>
-            <a:pPr marL="228600" indent="-228600">
+            <a:endParaRPr lang="en-US" sz="2600" dirty="0"/>
+          </a:p>
+          <a:p>
+            <a:pPr marL="304800" indent="-304800">
               <a:spcAft>
-                <a:spcPts val="600"/>
+                <a:spcPts val="800"/>
               </a:spcAft>
               <a:buSzPct val="100000"/>
               <a:buChar char="•"/>
             </a:pPr>
             <a:r>
-              <a:rPr lang="en-US" sz="2000" dirty="0">
+              <a:rPr lang="en-US" sz="2600" dirty="0">
                 <a:solidFill>
                   <a:srgbClr val="3A2E00"/>
                 </a:solidFill>
               </a:rPr>
               <a:t>Wash your hands at the end.</a:t>
             </a:r>
-            <a:endParaRPr lang="en-US" sz="2000" dirty="0"/>
-          </a:p>
-          <a:p>
-            <a:pPr marL="228600" indent="-228600">
+            <a:endParaRPr lang="en-US" sz="2600" dirty="0"/>
+          </a:p>
+          <a:p>
+            <a:pPr marL="304800" indent="-304800">
               <a:spcAft>
-                <a:spcPts val="600"/>
+                <a:spcPts val="800"/>
               </a:spcAft>
               <a:buSzPct val="100000"/>
               <a:buChar char="•"/>
             </a:pPr>
             <a:r>
-              <a:rPr lang="en-US" sz="2000" dirty="0">
+              <a:rPr lang="en-US" sz="2600" dirty="0">
                 <a:solidFill>
                   <a:srgbClr val="3A2E00"/>
                 </a:solidFill>
               </a:rPr>
               <a:t>Carry the microscope with two hands. Do not touch the lamp.</a:t>
             </a:r>
-            <a:endParaRPr lang="en-US" sz="2000" dirty="0"/>
-          </a:p>
-          <a:p>
-            <a:pPr marL="228600" indent="-228600">
+            <a:endParaRPr lang="en-US" sz="2600" dirty="0"/>
+          </a:p>
+          <a:p>
+            <a:pPr marL="304800" indent="-304800">
               <a:spcAft>
-                <a:spcPts val="600"/>
+                <a:spcPts val="800"/>
               </a:spcAft>
               <a:buSzPct val="100000"/>
               <a:buChar char="•"/>
             </a:pPr>
             <a:r>
-              <a:rPr lang="en-US" sz="2000" dirty="0">
+              <a:rPr lang="en-US" sz="2600" dirty="0">
                 <a:solidFill>
                   <a:srgbClr val="3A2E00"/>
                 </a:solidFill>
               </a:rPr>
               <a:t>Scissors: cut away from your fingers.</a:t>
             </a:r>
-            <a:endParaRPr lang="en-US" sz="2000" dirty="0"/>
+            <a:endParaRPr lang="en-US" sz="2600" dirty="0"/>
           </a:p>
         </p:txBody>
       </p:sp>
@@ -3494,7 +3494,7 @@
               <a:buNone/>
             </a:pPr>
             <a:r>
-              <a:rPr lang="en-US" sz="1500" b="1" dirty="0">
+              <a:rPr lang="en-US" sz="1800" b="1" dirty="0">
                 <a:solidFill>
                   <a:srgbClr val="7B3A8E"/>
                 </a:solidFill>
@@ -3505,14 +3505,14 @@
               <a:buNone/>
             </a:pPr>
             <a:r>
-              <a:rPr lang="en-US" sz="1500" dirty="0">
+              <a:rPr lang="en-US" sz="1800" dirty="0">
                 <a:solidFill>
                   <a:srgbClr val="141B26"/>
                 </a:solidFill>
               </a:rPr>
               <a:t>To see stomata and guard cells on the lower surface of a leaf and count them.</a:t>
             </a:r>
-            <a:endParaRPr lang="en-US" sz="1500" dirty="0"/>
+            <a:endParaRPr lang="en-US" sz="1800" dirty="0"/>
           </a:p>
         </p:txBody>
       </p:sp>
@@ -3541,14 +3541,14 @@
               <a:buNone/>
             </a:pPr>
             <a:r>
-              <a:rPr lang="en-US" sz="1600" b="1" dirty="0">
+              <a:rPr lang="en-US" sz="1800" b="1" dirty="0">
                 <a:solidFill>
                   <a:srgbClr val="0F2A5F"/>
                 </a:solidFill>
               </a:rPr>
               <a:t>Equipment</a:t>
             </a:r>
-            <a:endParaRPr lang="en-US" sz="1600" dirty="0"/>
+            <a:endParaRPr lang="en-US" sz="1800" dirty="0"/>
           </a:p>
         </p:txBody>
       </p:sp>
@@ -3570,309 +3570,305 @@
           <a:ln/>
         </p:spPr>
         <p:txBody>
-          <a:bodyPr wrap="square" lIns="0" tIns="0" rIns="0" bIns="0" rtlCol="0" anchor="t">
-            <a:normAutofit/>
-          </a:bodyPr>
-          <a:lstStyle/>
-          <a:p>
-            <a:pPr marL="228600" indent="-228600">
+          <a:bodyPr wrap="square" lIns="0" tIns="0" rIns="0" bIns="0" rtlCol="0" anchor="t"/>
+          <a:lstStyle/>
+          <a:p>
+            <a:pPr marL="304800" indent="-304800">
+              <a:spcAft>
+                <a:spcPts val="800"/>
+              </a:spcAft>
+              <a:buSzPct val="100000"/>
+              <a:buChar char="•"/>
+            </a:pPr>
+            <a:r>
+              <a:rPr lang="en-US" sz="1600" dirty="0">
+                <a:solidFill>
+                  <a:srgbClr val="141B26"/>
+                </a:solidFill>
+              </a:rPr>
+              <a:t>leaf with a smooth underside</a:t>
+            </a:r>
+            <a:endParaRPr lang="en-US" sz="1600" dirty="0"/>
+          </a:p>
+          <a:p>
+            <a:pPr marL="304800" indent="-304800">
+              <a:spcAft>
+                <a:spcPts val="800"/>
+              </a:spcAft>
+              <a:buSzPct val="100000"/>
+              <a:buChar char="•"/>
+            </a:pPr>
+            <a:r>
+              <a:rPr lang="en-US" sz="1600" dirty="0">
+                <a:solidFill>
+                  <a:srgbClr val="141B26"/>
+                </a:solidFill>
+              </a:rPr>
+              <a:t>clear nail varnish</a:t>
+            </a:r>
+            <a:endParaRPr lang="en-US" sz="1600" dirty="0"/>
+          </a:p>
+          <a:p>
+            <a:pPr marL="304800" indent="-304800">
+              <a:spcAft>
+                <a:spcPts val="800"/>
+              </a:spcAft>
+              <a:buSzPct val="100000"/>
+              <a:buChar char="•"/>
+            </a:pPr>
+            <a:r>
+              <a:rPr lang="en-US" sz="1600" dirty="0">
+                <a:solidFill>
+                  <a:srgbClr val="141B26"/>
+                </a:solidFill>
+              </a:rPr>
+              <a:t>clear sticky tape</a:t>
+            </a:r>
+            <a:endParaRPr lang="en-US" sz="1600" dirty="0"/>
+          </a:p>
+          <a:p>
+            <a:pPr marL="304800" indent="-304800">
+              <a:spcAft>
+                <a:spcPts val="800"/>
+              </a:spcAft>
+              <a:buSzPct val="100000"/>
+              <a:buChar char="•"/>
+            </a:pPr>
+            <a:r>
+              <a:rPr lang="en-US" sz="1600" dirty="0">
+                <a:solidFill>
+                  <a:srgbClr val="141B26"/>
+                </a:solidFill>
+              </a:rPr>
+              <a:t>scissors</a:t>
+            </a:r>
+            <a:endParaRPr lang="en-US" sz="1600" dirty="0"/>
+          </a:p>
+          <a:p>
+            <a:pPr marL="304800" indent="-304800">
+              <a:spcAft>
+                <a:spcPts val="800"/>
+              </a:spcAft>
+              <a:buSzPct val="100000"/>
+              <a:buChar char="•"/>
+            </a:pPr>
+            <a:r>
+              <a:rPr lang="en-US" sz="1600" dirty="0">
+                <a:solidFill>
+                  <a:srgbClr val="141B26"/>
+                </a:solidFill>
+              </a:rPr>
+              <a:t>microscope slide</a:t>
+            </a:r>
+            <a:endParaRPr lang="en-US" sz="1600" dirty="0"/>
+          </a:p>
+          <a:p>
+            <a:pPr marL="304800" indent="-304800">
+              <a:spcAft>
+                <a:spcPts val="800"/>
+              </a:spcAft>
+              <a:buSzPct val="100000"/>
+              <a:buChar char="•"/>
+            </a:pPr>
+            <a:r>
+              <a:rPr lang="en-US" sz="1600" dirty="0">
+                <a:solidFill>
+                  <a:srgbClr val="141B26"/>
+                </a:solidFill>
+              </a:rPr>
+              <a:t>microscope</a:t>
+            </a:r>
+            <a:endParaRPr lang="en-US" sz="1600" dirty="0"/>
+          </a:p>
+          <a:p>
+            <a:pPr marL="304800" indent="-304800">
+              <a:spcAft>
+                <a:spcPts val="800"/>
+              </a:spcAft>
+              <a:buSzPct val="100000"/>
+              <a:buChar char="•"/>
+            </a:pPr>
+            <a:r>
+              <a:rPr lang="en-US" sz="1600" dirty="0">
+                <a:solidFill>
+                  <a:srgbClr val="141B26"/>
+                </a:solidFill>
+              </a:rPr>
+              <a:t>worksheet</a:t>
+            </a:r>
+            <a:endParaRPr lang="en-US" sz="1600" dirty="0"/>
+          </a:p>
+        </p:txBody>
+      </p:sp>
+      <p:sp>
+        <p:nvSpPr>
+          <p:cNvPr id="8" name="Text 6"/>
+          <p:cNvSpPr txBox="1"/>
+          <p:nvPr/>
+        </p:nvSpPr>
+        <p:spPr>
+          <a:xfrm>
+            <a:off x="4937760" y="1828800"/>
+            <a:ext cx="6675120" cy="365760"/>
+          </a:xfrm>
+          <a:prstGeom prst="rect">
+            <a:avLst/>
+          </a:prstGeom>
+          <a:noFill/>
+          <a:ln/>
+        </p:spPr>
+        <p:txBody>
+          <a:bodyPr wrap="square" lIns="0" tIns="0" rIns="0" bIns="0" rtlCol="0" anchor="ctr"/>
+          <a:lstStyle/>
+          <a:p>
+            <a:pPr indent="0" marL="0">
+              <a:buNone/>
+            </a:pPr>
+            <a:r>
+              <a:rPr lang="en-US" sz="1800" b="1" dirty="0">
+                <a:solidFill>
+                  <a:srgbClr val="0F2A5F"/>
+                </a:solidFill>
+              </a:rPr>
+              <a:t>Method</a:t>
+            </a:r>
+            <a:endParaRPr lang="en-US" sz="1800" dirty="0"/>
+          </a:p>
+        </p:txBody>
+      </p:sp>
+      <p:sp>
+        <p:nvSpPr>
+          <p:cNvPr id="9" name="Text 7"/>
+          <p:cNvSpPr txBox="1"/>
+          <p:nvPr/>
+        </p:nvSpPr>
+        <p:spPr>
+          <a:xfrm>
+            <a:off x="4937760" y="2240280"/>
+            <a:ext cx="6675120" cy="3200400"/>
+          </a:xfrm>
+          <a:prstGeom prst="rect">
+            <a:avLst/>
+          </a:prstGeom>
+          <a:noFill/>
+          <a:ln/>
+        </p:spPr>
+        <p:txBody>
+          <a:bodyPr wrap="square" lIns="0" tIns="0" rIns="0" bIns="0" rtlCol="0" anchor="t"/>
+          <a:lstStyle/>
+          <a:p>
+            <a:pPr marL="342900" indent="-342900">
               <a:spcAft>
                 <a:spcPts val="600"/>
               </a:spcAft>
               <a:buSzPct val="100000"/>
-              <a:buChar char="•"/>
-            </a:pPr>
-            <a:r>
-              <a:rPr lang="en-US" sz="1300" dirty="0">
+              <a:buFont typeface="+mj-lt"/>
+              <a:buAutoNum type="arabicPeriod" startAt="1"/>
+            </a:pPr>
+            <a:r>
+              <a:rPr lang="en-US" sz="1500" dirty="0">
                 <a:solidFill>
                   <a:srgbClr val="141B26"/>
                 </a:solidFill>
               </a:rPr>
-              <a:t>leaf with a smooth underside</a:t>
-            </a:r>
-            <a:endParaRPr lang="en-US" sz="1300" dirty="0"/>
-          </a:p>
-          <a:p>
-            <a:pPr marL="228600" indent="-228600">
+              <a:t>Paint a thin layer of clear nail varnish on the lower surface of the leaf, about 1 cm square.</a:t>
+            </a:r>
+            <a:endParaRPr lang="en-US" sz="1500" dirty="0"/>
+          </a:p>
+          <a:p>
+            <a:pPr marL="342900" indent="-342900">
               <a:spcAft>
                 <a:spcPts val="600"/>
               </a:spcAft>
               <a:buSzPct val="100000"/>
-              <a:buChar char="•"/>
-            </a:pPr>
-            <a:r>
-              <a:rPr lang="en-US" sz="1300" dirty="0">
+              <a:buFont typeface="+mj-lt"/>
+              <a:buAutoNum type="arabicPeriod" startAt="1"/>
+            </a:pPr>
+            <a:r>
+              <a:rPr lang="en-US" sz="1500" dirty="0">
                 <a:solidFill>
                   <a:srgbClr val="141B26"/>
                 </a:solidFill>
               </a:rPr>
-              <a:t>clear nail varnish</a:t>
-            </a:r>
-            <a:endParaRPr lang="en-US" sz="1300" dirty="0"/>
-          </a:p>
-          <a:p>
-            <a:pPr marL="228600" indent="-228600">
+              <a:t>Leave it to dry for about 5 minutes. Do the Core questions while you wait.</a:t>
+            </a:r>
+            <a:endParaRPr lang="en-US" sz="1500" dirty="0"/>
+          </a:p>
+          <a:p>
+            <a:pPr marL="342900" indent="-342900">
               <a:spcAft>
                 <a:spcPts val="600"/>
               </a:spcAft>
               <a:buSzPct val="100000"/>
-              <a:buChar char="•"/>
-            </a:pPr>
-            <a:r>
-              <a:rPr lang="en-US" sz="1300" dirty="0">
+              <a:buFont typeface="+mj-lt"/>
+              <a:buAutoNum type="arabicPeriod" startAt="1"/>
+            </a:pPr>
+            <a:r>
+              <a:rPr lang="en-US" sz="1500" dirty="0">
                 <a:solidFill>
                   <a:srgbClr val="141B26"/>
                 </a:solidFill>
               </a:rPr>
-              <a:t>clear sticky tape</a:t>
-            </a:r>
-            <a:endParaRPr lang="en-US" sz="1300" dirty="0"/>
-          </a:p>
-          <a:p>
-            <a:pPr marL="228600" indent="-228600">
+              <a:t>Press a piece of clear sticky tape over the dry varnish, then peel the tape off slowly. The varnish layer comes with it.</a:t>
+            </a:r>
+            <a:endParaRPr lang="en-US" sz="1500" dirty="0"/>
+          </a:p>
+          <a:p>
+            <a:pPr marL="342900" indent="-342900">
               <a:spcAft>
                 <a:spcPts val="600"/>
               </a:spcAft>
               <a:buSzPct val="100000"/>
-              <a:buChar char="•"/>
-            </a:pPr>
-            <a:r>
-              <a:rPr lang="en-US" sz="1300" dirty="0">
+              <a:buFont typeface="+mj-lt"/>
+              <a:buAutoNum type="arabicPeriod" startAt="1"/>
+            </a:pPr>
+            <a:r>
+              <a:rPr lang="en-US" sz="1500" dirty="0">
                 <a:solidFill>
                   <a:srgbClr val="141B26"/>
                 </a:solidFill>
               </a:rPr>
-              <a:t>scissors</a:t>
-            </a:r>
-            <a:endParaRPr lang="en-US" sz="1300" dirty="0"/>
-          </a:p>
-          <a:p>
-            <a:pPr marL="228600" indent="-228600">
+              <a:t>Stick the tape, varnish side down, on a microscope slide.</a:t>
+            </a:r>
+            <a:endParaRPr lang="en-US" sz="1500" dirty="0"/>
+          </a:p>
+          <a:p>
+            <a:pPr marL="342900" indent="-342900">
               <a:spcAft>
                 <a:spcPts val="600"/>
               </a:spcAft>
               <a:buSzPct val="100000"/>
-              <a:buChar char="•"/>
-            </a:pPr>
-            <a:r>
-              <a:rPr lang="en-US" sz="1300" dirty="0">
+              <a:buFont typeface="+mj-lt"/>
+              <a:buAutoNum type="arabicPeriod" startAt="1"/>
+            </a:pPr>
+            <a:r>
+              <a:rPr lang="en-US" sz="1500" dirty="0">
                 <a:solidFill>
                   <a:srgbClr val="141B26"/>
                 </a:solidFill>
               </a:rPr>
-              <a:t>microscope slide</a:t>
-            </a:r>
-            <a:endParaRPr lang="en-US" sz="1300" dirty="0"/>
-          </a:p>
-          <a:p>
-            <a:pPr marL="228600" indent="-228600">
+              <a:t>Look at it on low power, then medium power. Find a stoma with its two guard cells.</a:t>
+            </a:r>
+            <a:endParaRPr lang="en-US" sz="1500" dirty="0"/>
+          </a:p>
+          <a:p>
+            <a:pPr marL="342900" indent="-342900">
               <a:spcAft>
                 <a:spcPts val="600"/>
               </a:spcAft>
               <a:buSzPct val="100000"/>
-              <a:buChar char="•"/>
-            </a:pPr>
-            <a:r>
-              <a:rPr lang="en-US" sz="1300" dirty="0">
-                <a:solidFill>
-                  <a:srgbClr val="141B26"/>
-                </a:solidFill>
-              </a:rPr>
-              <a:t>microscope</a:t>
-            </a:r>
-            <a:endParaRPr lang="en-US" sz="1300" dirty="0"/>
-          </a:p>
-          <a:p>
-            <a:pPr marL="228600" indent="-228600">
-              <a:spcAft>
-                <a:spcPts val="600"/>
-              </a:spcAft>
-              <a:buSzPct val="100000"/>
-              <a:buChar char="•"/>
-            </a:pPr>
-            <a:r>
-              <a:rPr lang="en-US" sz="1300" dirty="0">
-                <a:solidFill>
-                  <a:srgbClr val="141B26"/>
-                </a:solidFill>
-              </a:rPr>
-              <a:t>worksheet</a:t>
-            </a:r>
-            <a:endParaRPr lang="en-US" sz="1300" dirty="0"/>
-          </a:p>
-        </p:txBody>
-      </p:sp>
-      <p:sp>
-        <p:nvSpPr>
-          <p:cNvPr id="8" name="Text 6"/>
-          <p:cNvSpPr txBox="1"/>
-          <p:nvPr/>
-        </p:nvSpPr>
-        <p:spPr>
-          <a:xfrm>
-            <a:off x="4937760" y="1828800"/>
-            <a:ext cx="6675120" cy="365760"/>
-          </a:xfrm>
-          <a:prstGeom prst="rect">
-            <a:avLst/>
-          </a:prstGeom>
-          <a:noFill/>
-          <a:ln/>
-        </p:spPr>
-        <p:txBody>
-          <a:bodyPr wrap="square" lIns="0" tIns="0" rIns="0" bIns="0" rtlCol="0" anchor="ctr"/>
-          <a:lstStyle/>
-          <a:p>
-            <a:pPr indent="0" marL="0">
-              <a:buNone/>
-            </a:pPr>
-            <a:r>
-              <a:rPr lang="en-US" sz="1600" b="1" dirty="0">
-                <a:solidFill>
-                  <a:srgbClr val="0F2A5F"/>
-                </a:solidFill>
-              </a:rPr>
-              <a:t>Method</a:t>
-            </a:r>
-            <a:endParaRPr lang="en-US" sz="1600" dirty="0"/>
-          </a:p>
-        </p:txBody>
-      </p:sp>
-      <p:sp>
-        <p:nvSpPr>
-          <p:cNvPr id="9" name="Text 7"/>
-          <p:cNvSpPr txBox="1"/>
-          <p:nvPr/>
-        </p:nvSpPr>
-        <p:spPr>
-          <a:xfrm>
-            <a:off x="4937760" y="2240280"/>
-            <a:ext cx="6675120" cy="3200400"/>
-          </a:xfrm>
-          <a:prstGeom prst="rect">
-            <a:avLst/>
-          </a:prstGeom>
-          <a:noFill/>
-          <a:ln/>
-        </p:spPr>
-        <p:txBody>
-          <a:bodyPr wrap="square" lIns="0" tIns="0" rIns="0" bIns="0" rtlCol="0" anchor="t">
-            <a:normAutofit/>
-          </a:bodyPr>
-          <a:lstStyle/>
-          <a:p>
-            <a:pPr marL="342900" indent="-342900">
-              <a:spcAft>
-                <a:spcPts val="500"/>
-              </a:spcAft>
-              <a:buSzPct val="100000"/>
               <a:buFont typeface="+mj-lt"/>
               <a:buAutoNum type="arabicPeriod" startAt="1"/>
             </a:pPr>
             <a:r>
-              <a:rPr lang="en-US" sz="1300" dirty="0">
+              <a:rPr lang="en-US" sz="1500" dirty="0">
                 <a:solidFill>
                   <a:srgbClr val="141B26"/>
                 </a:solidFill>
               </a:rPr>
-              <a:t>Paint a thin layer of clear nail varnish on the lower surface of the leaf, about 1 cm square.</a:t>
-            </a:r>
-            <a:endParaRPr lang="en-US" sz="1300" dirty="0"/>
-          </a:p>
-          <a:p>
-            <a:pPr marL="342900" indent="-342900">
-              <a:spcAft>
-                <a:spcPts val="500"/>
-              </a:spcAft>
-              <a:buSzPct val="100000"/>
-              <a:buFont typeface="+mj-lt"/>
-              <a:buAutoNum type="arabicPeriod" startAt="1"/>
-            </a:pPr>
-            <a:r>
-              <a:rPr lang="en-US" sz="1300" dirty="0">
-                <a:solidFill>
-                  <a:srgbClr val="141B26"/>
-                </a:solidFill>
-              </a:rPr>
-              <a:t>Leave it to dry for about 5 minutes. Do the Core questions while you wait.</a:t>
-            </a:r>
-            <a:endParaRPr lang="en-US" sz="1300" dirty="0"/>
-          </a:p>
-          <a:p>
-            <a:pPr marL="342900" indent="-342900">
-              <a:spcAft>
-                <a:spcPts val="500"/>
-              </a:spcAft>
-              <a:buSzPct val="100000"/>
-              <a:buFont typeface="+mj-lt"/>
-              <a:buAutoNum type="arabicPeriod" startAt="1"/>
-            </a:pPr>
-            <a:r>
-              <a:rPr lang="en-US" sz="1300" dirty="0">
-                <a:solidFill>
-                  <a:srgbClr val="141B26"/>
-                </a:solidFill>
-              </a:rPr>
-              <a:t>Press a piece of clear sticky tape over the dry varnish, then peel the tape off slowly. The varnish layer comes with it.</a:t>
-            </a:r>
-            <a:endParaRPr lang="en-US" sz="1300" dirty="0"/>
-          </a:p>
-          <a:p>
-            <a:pPr marL="342900" indent="-342900">
-              <a:spcAft>
-                <a:spcPts val="500"/>
-              </a:spcAft>
-              <a:buSzPct val="100000"/>
-              <a:buFont typeface="+mj-lt"/>
-              <a:buAutoNum type="arabicPeriod" startAt="1"/>
-            </a:pPr>
-            <a:r>
-              <a:rPr lang="en-US" sz="1300" dirty="0">
-                <a:solidFill>
-                  <a:srgbClr val="141B26"/>
-                </a:solidFill>
-              </a:rPr>
-              <a:t>Stick the tape, varnish side down, on a microscope slide.</a:t>
-            </a:r>
-            <a:endParaRPr lang="en-US" sz="1300" dirty="0"/>
-          </a:p>
-          <a:p>
-            <a:pPr marL="342900" indent="-342900">
-              <a:spcAft>
-                <a:spcPts val="500"/>
-              </a:spcAft>
-              <a:buSzPct val="100000"/>
-              <a:buFont typeface="+mj-lt"/>
-              <a:buAutoNum type="arabicPeriod" startAt="1"/>
-            </a:pPr>
-            <a:r>
-              <a:rPr lang="en-US" sz="1300" dirty="0">
-                <a:solidFill>
-                  <a:srgbClr val="141B26"/>
-                </a:solidFill>
-              </a:rPr>
-              <a:t>Look at it on low power, then medium power. Find a stoma with its two guard cells.</a:t>
-            </a:r>
-            <a:endParaRPr lang="en-US" sz="1300" dirty="0"/>
-          </a:p>
-          <a:p>
-            <a:pPr marL="342900" indent="-342900">
-              <a:spcAft>
-                <a:spcPts val="500"/>
-              </a:spcAft>
-              <a:buSzPct val="100000"/>
-              <a:buFont typeface="+mj-lt"/>
-              <a:buAutoNum type="arabicPeriod" startAt="1"/>
-            </a:pPr>
-            <a:r>
-              <a:rPr lang="en-US" sz="1300" dirty="0">
-                <a:solidFill>
-                  <a:srgbClr val="141B26"/>
-                </a:solidFill>
-              </a:rPr>
               <a:t>Draw one stoma and its guard cells. Count the stomata you can see in the field of view, three times, and record the counts.</a:t>
             </a:r>
-            <a:endParaRPr lang="en-US" sz="1300" dirty="0"/>
+            <a:endParaRPr lang="en-US" sz="1500" dirty="0"/>
           </a:p>
         </p:txBody>
       </p:sp>
@@ -3919,16 +3915,14 @@
           <a:ln/>
         </p:spPr>
         <p:txBody>
-          <a:bodyPr wrap="square" lIns="0" tIns="0" rIns="0" bIns="0" rtlCol="0" anchor="ctr">
-            <a:normAutofit/>
-          </a:bodyPr>
+          <a:bodyPr wrap="square" lIns="0" tIns="0" rIns="0" bIns="0" rtlCol="0" anchor="ctr"/>
           <a:lstStyle/>
           <a:p>
             <a:pPr indent="0" marL="0">
               <a:buNone/>
             </a:pPr>
             <a:r>
-              <a:rPr lang="en-US" sz="1300" b="1" dirty="0">
+              <a:rPr lang="en-US" sz="1500" b="1" dirty="0">
                 <a:solidFill>
                   <a:srgbClr val="3A2E00"/>
                 </a:solidFill>
@@ -3939,14 +3933,14 @@
               <a:buNone/>
             </a:pPr>
             <a:r>
-              <a:rPr lang="en-US" sz="1300" dirty="0">
+              <a:rPr lang="en-US" sz="1500" dirty="0">
                 <a:solidFill>
                   <a:srgbClr val="3A2E00"/>
                 </a:solidFill>
               </a:rPr>
               <a:t>Varnish lids on. Away from flames. Wash hands at the end.</a:t>
             </a:r>
-            <a:endParaRPr lang="en-US" sz="1300" dirty="0"/>
+            <a:endParaRPr lang="en-US" sz="1500" dirty="0"/>
           </a:p>
         </p:txBody>
       </p:sp>
@@ -4275,23 +4269,21 @@
           <a:ln/>
         </p:spPr>
         <p:txBody>
-          <a:bodyPr wrap="square" lIns="0" tIns="0" rIns="0" bIns="0" rtlCol="0" anchor="t">
-            <a:normAutofit/>
-          </a:bodyPr>
+          <a:bodyPr wrap="square" lIns="0" tIns="0" rIns="0" bIns="0" rtlCol="0" anchor="t"/>
           <a:lstStyle/>
           <a:p>
             <a:pPr indent="0" marL="0">
               <a:buNone/>
             </a:pPr>
             <a:r>
-              <a:rPr lang="en-US" sz="1700" dirty="0">
+              <a:rPr lang="en-US" sz="2000" dirty="0">
                 <a:solidFill>
                   <a:srgbClr val="141B26"/>
                 </a:solidFill>
               </a:rPr>
               <a:t>While the varnish dries: Core 1 to 3 on the worksheet.</a:t>
             </a:r>
-            <a:endParaRPr lang="en-US" sz="1700" dirty="0"/>
+            <a:endParaRPr lang="en-US" sz="2000" dirty="0"/>
           </a:p>
         </p:txBody>
       </p:sp>
@@ -4374,23 +4366,21 @@
           <a:ln/>
         </p:spPr>
         <p:txBody>
-          <a:bodyPr wrap="square" lIns="0" tIns="0" rIns="0" bIns="0" rtlCol="0" anchor="t">
-            <a:normAutofit/>
-          </a:bodyPr>
+          <a:bodyPr wrap="square" lIns="0" tIns="0" rIns="0" bIns="0" rtlCol="0" anchor="t"/>
           <a:lstStyle/>
           <a:p>
             <a:pPr indent="0" marL="0">
               <a:buNone/>
             </a:pPr>
             <a:r>
-              <a:rPr lang="en-US" sz="1700" dirty="0">
+              <a:rPr lang="en-US" sz="2000" dirty="0">
                 <a:solidFill>
                   <a:srgbClr val="141B26"/>
                 </a:solidFill>
               </a:rPr>
               <a:t>View your peel: draw one stoma with its guard cells and record three counts (Core 4).</a:t>
             </a:r>
-            <a:endParaRPr lang="en-US" sz="1700" dirty="0"/>
+            <a:endParaRPr lang="en-US" sz="2000" dirty="0"/>
           </a:p>
         </p:txBody>
       </p:sp>
@@ -4473,23 +4463,21 @@
           <a:ln/>
         </p:spPr>
         <p:txBody>
-          <a:bodyPr wrap="square" lIns="0" tIns="0" rIns="0" bIns="0" rtlCol="0" anchor="t">
-            <a:normAutofit/>
-          </a:bodyPr>
+          <a:bodyPr wrap="square" lIns="0" tIns="0" rIns="0" bIns="0" rtlCol="0" anchor="t"/>
           <a:lstStyle/>
           <a:p>
             <a:pPr indent="0" marL="0">
               <a:buNone/>
             </a:pPr>
             <a:r>
-              <a:rPr lang="en-US" sz="1700" dirty="0">
+              <a:rPr lang="en-US" sz="2000" dirty="0">
                 <a:solidFill>
                   <a:srgbClr val="141B26"/>
                 </a:solidFill>
               </a:rPr>
               <a:t>Stretch: why stomata open and close; the hot-day passage; the windy day.</a:t>
             </a:r>
-            <a:endParaRPr lang="en-US" sz="1700" dirty="0"/>
+            <a:endParaRPr lang="en-US" sz="2000" dirty="0"/>
           </a:p>
         </p:txBody>
       </p:sp>
@@ -4572,23 +4560,21 @@
           <a:ln/>
         </p:spPr>
         <p:txBody>
-          <a:bodyPr wrap="square" lIns="0" tIns="0" rIns="0" bIns="0" rtlCol="0" anchor="t">
-            <a:normAutofit/>
-          </a:bodyPr>
+          <a:bodyPr wrap="square" lIns="0" tIns="0" rIns="0" bIns="0" rtlCol="0" anchor="t"/>
           <a:lstStyle/>
           <a:p>
             <a:pPr indent="0" marL="0">
               <a:buNone/>
             </a:pPr>
             <a:r>
-              <a:rPr lang="en-US" sz="1700" dirty="0">
+              <a:rPr lang="en-US" sz="2000" dirty="0">
                 <a:solidFill>
                   <a:srgbClr val="141B26"/>
                 </a:solidFill>
               </a:rPr>
               <a:t>Challenge: why stomata are mostly underneath; estimate the stomata on a whole leaf.</a:t>
             </a:r>
-            <a:endParaRPr lang="en-US" sz="1700" dirty="0"/>
+            <a:endParaRPr lang="en-US" sz="2000" dirty="0"/>
           </a:p>
         </p:txBody>
       </p:sp>
@@ -4617,14 +4603,14 @@
               <a:buNone/>
             </a:pPr>
             <a:r>
-              <a:rPr lang="en-US" sz="1300" i="1" dirty="0">
+              <a:rPr lang="en-US" sz="1500" i="1" dirty="0">
                 <a:solidFill>
                   <a:srgbClr val="5B6574"/>
                 </a:solidFill>
               </a:rPr>
               <a:t>Clear up: slides in the tray, varnish lids on, microscope on low power, hands washed.</a:t>
             </a:r>
-            <a:endParaRPr lang="en-US" sz="1300" dirty="0"/>
+            <a:endParaRPr lang="en-US" sz="1500" dirty="0"/>
           </a:p>
         </p:txBody>
       </p:sp>
@@ -4817,23 +4803,21 @@
           <a:ln/>
         </p:spPr>
         <p:txBody>
-          <a:bodyPr wrap="square" lIns="0" tIns="0" rIns="0" bIns="0" rtlCol="0" anchor="t">
-            <a:normAutofit/>
-          </a:bodyPr>
+          <a:bodyPr wrap="square" lIns="0" tIns="0" rIns="0" bIns="0" rtlCol="0" anchor="t"/>
           <a:lstStyle/>
           <a:p>
             <a:pPr indent="0" marL="0">
               <a:buNone/>
             </a:pPr>
             <a:r>
-              <a:rPr lang="en-US" sz="2200" b="1" dirty="0">
+              <a:rPr lang="en-US" sz="2600" b="1" dirty="0">
                 <a:solidFill>
                   <a:srgbClr val="0F2A5F"/>
                 </a:solidFill>
               </a:rPr>
               <a:t>The plant in the hot room wilted. Use particles, evaporation, diffusion and stomata to explain why.</a:t>
             </a:r>
-            <a:endParaRPr lang="en-US" sz="2200" dirty="0"/>
+            <a:endParaRPr lang="en-US" sz="2600" dirty="0"/>
           </a:p>
         </p:txBody>
       </p:sp>
@@ -4882,9 +4866,7 @@
           <a:ln/>
         </p:spPr>
         <p:txBody>
-          <a:bodyPr wrap="square" lIns="0" tIns="0" rIns="0" bIns="0" rtlCol="0" anchor="t">
-            <a:normAutofit/>
-          </a:bodyPr>
+          <a:bodyPr wrap="square" lIns="0" tIns="0" rIns="0" bIns="0" rtlCol="0" anchor="t"/>
           <a:lstStyle/>
           <a:p>
             <a:pPr indent="0" marL="0">
@@ -4894,14 +4876,14 @@
               <a:buNone/>
             </a:pPr>
             <a:r>
-              <a:rPr lang="en-US" sz="1500" b="1" dirty="0">
+              <a:rPr lang="en-US" sz="1800" b="1" dirty="0">
                 <a:solidFill>
                   <a:srgbClr val="7B3A8E"/>
                 </a:solidFill>
               </a:rPr>
               <a:t>Sentence frames</a:t>
             </a:r>
-            <a:endParaRPr lang="en-US" sz="1500" dirty="0"/>
+            <a:endParaRPr lang="en-US" sz="1800" dirty="0"/>
           </a:p>
           <a:p>
             <a:pPr indent="0" marL="0">
@@ -4911,14 +4893,14 @@
               <a:buNone/>
             </a:pPr>
             <a:r>
-              <a:rPr lang="en-US" sz="1500" dirty="0">
+              <a:rPr lang="en-US" sz="1800" dirty="0">
                 <a:solidFill>
                   <a:srgbClr val="141B26"/>
                 </a:solidFill>
               </a:rPr>
               <a:t>When the temperature is higher, particles move ___.</a:t>
             </a:r>
-            <a:endParaRPr lang="en-US" sz="1500" dirty="0"/>
+            <a:endParaRPr lang="en-US" sz="1800" dirty="0"/>
           </a:p>
           <a:p>
             <a:pPr indent="0" marL="0">
@@ -4928,14 +4910,14 @@
               <a:buNone/>
             </a:pPr>
             <a:r>
-              <a:rPr lang="en-US" sz="1500" dirty="0">
+              <a:rPr lang="en-US" sz="1800" dirty="0">
                 <a:solidFill>
                   <a:srgbClr val="141B26"/>
                 </a:solidFill>
               </a:rPr>
               <a:t>So water evaporates inside the leaf ___ and water vapour diffuses out through the stomata ___.</a:t>
             </a:r>
-            <a:endParaRPr lang="en-US" sz="1500" dirty="0"/>
+            <a:endParaRPr lang="en-US" sz="1800" dirty="0"/>
           </a:p>
           <a:p>
             <a:pPr indent="0" marL="0">
@@ -4945,14 +4927,14 @@
               <a:buNone/>
             </a:pPr>
             <a:r>
-              <a:rPr lang="en-US" sz="1500" dirty="0">
+              <a:rPr lang="en-US" sz="1800" dirty="0">
                 <a:solidFill>
                   <a:srgbClr val="141B26"/>
                 </a:solidFill>
               </a:rPr>
               <a:t>The roots cannot replace the water fast enough, so the cells ___ and the plant ___.</a:t>
             </a:r>
-            <a:endParaRPr lang="en-US" sz="1500" dirty="0"/>
+            <a:endParaRPr lang="en-US" sz="1800" dirty="0"/>
           </a:p>
         </p:txBody>
       </p:sp>
@@ -5152,14 +5134,14 @@
               <a:buNone/>
             </a:pPr>
             <a:r>
-              <a:rPr lang="en-US" sz="1400" i="1" dirty="0">
+              <a:rPr lang="en-US" sz="1600" i="1" dirty="0">
                 <a:solidFill>
                   <a:srgbClr val="5B6574"/>
                 </a:solidFill>
               </a:rPr>
               <a:t>On your worksheet exit ticket. Work alone. Hand it in as you leave.</a:t>
             </a:r>
-            <a:endParaRPr lang="en-US" sz="1400" dirty="0"/>
+            <a:endParaRPr lang="en-US" sz="1600" dirty="0"/>
           </a:p>
         </p:txBody>
       </p:sp>
@@ -5172,25 +5154,23 @@
         <p:spPr>
           <a:xfrm>
             <a:off x="548640" y="1828800"/>
-            <a:ext cx="10881360" cy="1188720"/>
-          </a:xfrm>
-          <a:prstGeom prst="rect">
-            <a:avLst/>
-          </a:prstGeom>
-          <a:noFill/>
-          <a:ln/>
-        </p:spPr>
-        <p:txBody>
-          <a:bodyPr wrap="square" lIns="0" tIns="0" rIns="0" bIns="0" rtlCol="0" anchor="t">
-            <a:normAutofit/>
-          </a:bodyPr>
+            <a:ext cx="9692640" cy="1188720"/>
+          </a:xfrm>
+          <a:prstGeom prst="rect">
+            <a:avLst/>
+          </a:prstGeom>
+          <a:noFill/>
+          <a:ln/>
+        </p:spPr>
+        <p:txBody>
+          <a:bodyPr wrap="square" lIns="0" tIns="0" rIns="0" bIns="0" rtlCol="0" anchor="t"/>
           <a:lstStyle/>
           <a:p>
             <a:pPr indent="0" marL="0">
               <a:buNone/>
             </a:pPr>
             <a:r>
-              <a:rPr lang="en-US" sz="1800" b="1" dirty="0">
+              <a:rPr lang="en-US" sz="2200" b="1" dirty="0">
                 <a:solidFill>
                   <a:srgbClr val="7B3A8E"/>
                 </a:solidFill>
@@ -5201,14 +5181,14 @@
               <a:buNone/>
             </a:pPr>
             <a:r>
-              <a:rPr lang="en-US" sz="1800" dirty="0">
+              <a:rPr lang="en-US" sz="2200" dirty="0">
                 <a:solidFill>
                   <a:srgbClr val="141B26"/>
                 </a:solidFill>
               </a:rPr>
               <a:t>What is the job of the guard cells?</a:t>
             </a:r>
-            <a:endParaRPr lang="en-US" sz="1800" dirty="0"/>
+            <a:endParaRPr lang="en-US" sz="2200" dirty="0"/>
           </a:p>
         </p:txBody>
       </p:sp>
@@ -5221,25 +5201,23 @@
         <p:spPr>
           <a:xfrm>
             <a:off x="548640" y="3017520"/>
-            <a:ext cx="10881360" cy="1188720"/>
-          </a:xfrm>
-          <a:prstGeom prst="rect">
-            <a:avLst/>
-          </a:prstGeom>
-          <a:noFill/>
-          <a:ln/>
-        </p:spPr>
-        <p:txBody>
-          <a:bodyPr wrap="square" lIns="0" tIns="0" rIns="0" bIns="0" rtlCol="0" anchor="t">
-            <a:normAutofit/>
-          </a:bodyPr>
+            <a:ext cx="9692640" cy="1188720"/>
+          </a:xfrm>
+          <a:prstGeom prst="rect">
+            <a:avLst/>
+          </a:prstGeom>
+          <a:noFill/>
+          <a:ln/>
+        </p:spPr>
+        <p:txBody>
+          <a:bodyPr wrap="square" lIns="0" tIns="0" rIns="0" bIns="0" rtlCol="0" anchor="t"/>
           <a:lstStyle/>
           <a:p>
             <a:pPr indent="0" marL="0">
               <a:buNone/>
             </a:pPr>
             <a:r>
-              <a:rPr lang="en-US" sz="1800" b="1" dirty="0">
+              <a:rPr lang="en-US" sz="2200" b="1" dirty="0">
                 <a:solidFill>
                   <a:srgbClr val="7B3A8E"/>
                 </a:solidFill>
@@ -5250,14 +5228,14 @@
               <a:buNone/>
             </a:pPr>
             <a:r>
-              <a:rPr lang="en-US" sz="1800" dirty="0">
+              <a:rPr lang="en-US" sz="2200" dirty="0">
                 <a:solidFill>
                   <a:srgbClr val="141B26"/>
                 </a:solidFill>
               </a:rPr>
               <a:t>Name two gases that are exchanged between a leaf and the air through its stomata.</a:t>
             </a:r>
-            <a:endParaRPr lang="en-US" sz="1800" dirty="0"/>
+            <a:endParaRPr lang="en-US" sz="2200" dirty="0"/>
           </a:p>
         </p:txBody>
       </p:sp>
@@ -5270,25 +5248,23 @@
         <p:spPr>
           <a:xfrm>
             <a:off x="548640" y="4206240"/>
-            <a:ext cx="10881360" cy="1188720"/>
-          </a:xfrm>
-          <a:prstGeom prst="rect">
-            <a:avLst/>
-          </a:prstGeom>
-          <a:noFill/>
-          <a:ln/>
-        </p:spPr>
-        <p:txBody>
-          <a:bodyPr wrap="square" lIns="0" tIns="0" rIns="0" bIns="0" rtlCol="0" anchor="t">
-            <a:normAutofit/>
-          </a:bodyPr>
+            <a:ext cx="9692640" cy="1188720"/>
+          </a:xfrm>
+          <a:prstGeom prst="rect">
+            <a:avLst/>
+          </a:prstGeom>
+          <a:noFill/>
+          <a:ln/>
+        </p:spPr>
+        <p:txBody>
+          <a:bodyPr wrap="square" lIns="0" tIns="0" rIns="0" bIns="0" rtlCol="0" anchor="t"/>
           <a:lstStyle/>
           <a:p>
             <a:pPr indent="0" marL="0">
               <a:buNone/>
             </a:pPr>
             <a:r>
-              <a:rPr lang="en-US" sz="1800" b="1" dirty="0">
+              <a:rPr lang="en-US" sz="2200" b="1" dirty="0">
                 <a:solidFill>
                   <a:srgbClr val="7B3A8E"/>
                 </a:solidFill>
@@ -5299,14 +5275,14 @@
               <a:buNone/>
             </a:pPr>
             <a:r>
-              <a:rPr lang="en-US" sz="1800" dirty="0">
+              <a:rPr lang="en-US" sz="2200" dirty="0">
                 <a:solidFill>
                   <a:srgbClr val="141B26"/>
                 </a:solidFill>
               </a:rPr>
               <a:t>Explain why a leaf loses more water on a hot day than on a cool day.</a:t>
             </a:r>
-            <a:endParaRPr lang="en-US" sz="1800" dirty="0"/>
+            <a:endParaRPr lang="en-US" sz="2200" dirty="0"/>
           </a:p>
         </p:txBody>
       </p:sp>
@@ -5565,90 +5541,88 @@
         <p:spPr>
           <a:xfrm>
             <a:off x="548640" y="1371600"/>
-            <a:ext cx="10881360" cy="4480560"/>
-          </a:xfrm>
-          <a:prstGeom prst="rect">
-            <a:avLst/>
-          </a:prstGeom>
-          <a:noFill/>
-          <a:ln/>
-        </p:spPr>
-        <p:txBody>
-          <a:bodyPr wrap="square" lIns="0" tIns="0" rIns="0" bIns="0" rtlCol="0" anchor="t">
-            <a:normAutofit/>
-          </a:bodyPr>
+            <a:ext cx="10881360" cy="4114800"/>
+          </a:xfrm>
+          <a:prstGeom prst="rect">
+            <a:avLst/>
+          </a:prstGeom>
+          <a:noFill/>
+          <a:ln/>
+        </p:spPr>
+        <p:txBody>
+          <a:bodyPr wrap="square" lIns="0" tIns="0" rIns="0" bIns="0" rtlCol="0" anchor="t"/>
           <a:lstStyle/>
           <a:p>
             <a:pPr marL="342900" indent="-342900">
               <a:spcAft>
-                <a:spcPts val="1000"/>
+                <a:spcPts val="1200"/>
               </a:spcAft>
               <a:buSzPct val="100000"/>
               <a:buChar char="✓"/>
             </a:pPr>
             <a:r>
-              <a:rPr lang="en-US" sz="1700" dirty="0">
+              <a:rPr lang="en-US" sz="2000" dirty="0">
                 <a:solidFill>
                   <a:srgbClr val="141B26"/>
                 </a:solidFill>
               </a:rPr>
               <a:t>Stomata are tiny holes in the leaf, opened and closed by guard cells: open in the light, shut at night.</a:t>
             </a:r>
-            <a:endParaRPr lang="en-US" sz="1700" dirty="0"/>
+            <a:endParaRPr lang="en-US" sz="2000" dirty="0"/>
           </a:p>
           <a:p>
             <a:pPr marL="342900" indent="-342900">
               <a:spcAft>
-                <a:spcPts val="1000"/>
+                <a:spcPts val="1200"/>
               </a:spcAft>
               <a:buSzPct val="100000"/>
               <a:buChar char="✓"/>
             </a:pPr>
             <a:r>
-              <a:rPr lang="en-US" sz="1700" dirty="0">
+              <a:rPr lang="en-US" sz="2000" dirty="0">
                 <a:solidFill>
                   <a:srgbClr val="141B26"/>
                 </a:solidFill>
               </a:rPr>
               <a:t>Gases move in and out by diffusion, from high to low concentration; faster when it is warmer and when the difference is bigger.</a:t>
             </a:r>
-            <a:endParaRPr lang="en-US" sz="1700" dirty="0"/>
+            <a:endParaRPr lang="en-US" sz="2000" dirty="0"/>
           </a:p>
           <a:p>
             <a:pPr marL="342900" indent="-342900">
               <a:spcAft>
-                <a:spcPts val="1000"/>
+                <a:spcPts val="1200"/>
               </a:spcAft>
               <a:buSzPct val="100000"/>
               <a:buChar char="✓"/>
             </a:pPr>
             <a:r>
-              <a:rPr lang="en-US" sz="1700" dirty="0">
+              <a:rPr lang="en-US" sz="2000" dirty="0">
                 <a:solidFill>
                   <a:srgbClr val="141B26"/>
                 </a:solidFill>
               </a:rPr>
               <a:t>Photosynthesis uses carbon dioxide inside the leaf, so carbon dioxide diffuses in; oxygen diffuses out.</a:t>
             </a:r>
-            <a:endParaRPr lang="en-US" sz="1700" dirty="0"/>
+            <a:endParaRPr lang="en-US" sz="2000" dirty="0"/>
           </a:p>
           <a:p>
             <a:pPr marL="342900" indent="-342900">
               <a:spcAft>
-                <a:spcPts val="1000"/>
+                <a:spcPts val="1200"/>
               </a:spcAft>
               <a:buSzPct val="100000"/>
               <a:buChar char="✓"/>
             </a:pPr>
             <a:r>
-              <a:rPr lang="en-US" sz="1700" dirty="0">
+              <a:rPr lang="en-US" sz="2000" dirty="0">
                 <a:solidFill>
                   <a:srgbClr val="141B26"/>
                 </a:solidFill>
               </a:rPr>
               <a:t>Water vapour also diffuses out through open stomata; on a hot, dry or windy day the plant can wilt.</a:t>
             </a:r>
-            <a:endParaRPr lang="en-US" sz="1700" dirty="0"/>
+            <a:endParaRPr lang="en-US" sz="2000" dirty="0"/>
           </a:p>
         </p:txBody>
       </p:sp>
@@ -5677,7 +5651,7 @@
               <a:buNone/>
             </a:pPr>
             <a:r>
-              <a:rPr lang="en-US" sz="1300" b="1" dirty="0">
+              <a:rPr lang="en-US" sz="1500" b="1" dirty="0">
                 <a:solidFill>
                   <a:srgbClr val="7B3A8E"/>
                 </a:solidFill>
@@ -5688,14 +5662,14 @@
               <a:buNone/>
             </a:pPr>
             <a:r>
-              <a:rPr lang="en-US" sz="1300" dirty="0">
+              <a:rPr lang="en-US" sz="1500" dirty="0">
                 <a:solidFill>
                   <a:srgbClr val="141B26"/>
                 </a:solidFill>
               </a:rPr>
               <a:t>What plants make from glucose: starch, lipids and proteins, and how we test for them.</a:t>
             </a:r>
-            <a:endParaRPr lang="en-US" sz="1300" dirty="0"/>
+            <a:endParaRPr lang="en-US" sz="1500" dirty="0"/>
           </a:p>
         </p:txBody>
       </p:sp>
@@ -5963,60 +5937,58 @@
           <a:ln/>
         </p:spPr>
         <p:txBody>
-          <a:bodyPr wrap="square" lIns="0" tIns="0" rIns="0" bIns="0" rtlCol="0" anchor="t">
-            <a:normAutofit/>
-          </a:bodyPr>
+          <a:bodyPr wrap="square" lIns="0" tIns="0" rIns="0" bIns="0" rtlCol="0" anchor="t"/>
           <a:lstStyle/>
           <a:p>
             <a:pPr indent="0" marL="0">
               <a:spcAft>
-                <a:spcPts val="1000"/>
+                <a:spcPts val="1200"/>
               </a:spcAft>
               <a:buNone/>
             </a:pPr>
             <a:r>
-              <a:rPr lang="en-US" sz="2000" dirty="0">
+              <a:rPr lang="en-US" sz="2400" dirty="0">
                 <a:solidFill>
                   <a:srgbClr val="141B26"/>
                 </a:solidFill>
               </a:rPr>
               <a:t>1. What is this hole in the leaf surface called?</a:t>
             </a:r>
-            <a:endParaRPr lang="en-US" sz="2000" dirty="0"/>
+            <a:endParaRPr lang="en-US" sz="2400" dirty="0"/>
           </a:p>
           <a:p>
             <a:pPr indent="0" marL="0">
               <a:spcAft>
-                <a:spcPts val="1000"/>
+                <a:spcPts val="1200"/>
               </a:spcAft>
               <a:buNone/>
             </a:pPr>
             <a:r>
-              <a:rPr lang="en-US" sz="2000" dirty="0">
+              <a:rPr lang="en-US" sz="2400" dirty="0">
                 <a:solidFill>
                   <a:srgbClr val="141B26"/>
                 </a:solidFill>
               </a:rPr>
               <a:t>2. Name two gases that pass through it.</a:t>
             </a:r>
-            <a:endParaRPr lang="en-US" sz="2000" dirty="0"/>
+            <a:endParaRPr lang="en-US" sz="2400" dirty="0"/>
           </a:p>
           <a:p>
             <a:pPr indent="0" marL="0">
               <a:spcAft>
-                <a:spcPts val="1000"/>
+                <a:spcPts val="1200"/>
               </a:spcAft>
               <a:buNone/>
             </a:pPr>
             <a:r>
-              <a:rPr lang="en-US" sz="2000" dirty="0">
+              <a:rPr lang="en-US" sz="2400" dirty="0">
                 <a:solidFill>
                   <a:srgbClr val="141B26"/>
                 </a:solidFill>
               </a:rPr>
               <a:t>3. Predict when the hole is shut: day or night?</a:t>
             </a:r>
-            <a:endParaRPr lang="en-US" sz="2000" dirty="0"/>
+            <a:endParaRPr lang="en-US" sz="2400" dirty="0"/>
           </a:p>
         </p:txBody>
       </p:sp>
@@ -6053,7 +6025,7 @@
         <p:spPr>
           <a:xfrm>
             <a:off x="6858000" y="5349240"/>
-            <a:ext cx="4754880" cy="502920"/>
+            <a:ext cx="4754880" cy="548640"/>
           </a:xfrm>
           <a:prstGeom prst="rect">
             <a:avLst/>
@@ -6069,7 +6041,7 @@
               <a:buNone/>
             </a:pPr>
             <a:r>
-              <a:rPr lang="en-US" sz="1100" dirty="0">
+              <a:rPr lang="en-US" sz="1300" dirty="0">
                 <a:solidFill>
                   <a:srgbClr val="141B26"/>
                 </a:solidFill>
@@ -6079,21 +6051,21 @@
             <a:pPr algn="l" indent="0" marL="0">
               <a:buNone/>
             </a:pPr>
-            <a:endParaRPr lang="en-US" sz="1100" dirty="0"/>
+            <a:endParaRPr lang="en-US" sz="1300" dirty="0"/>
           </a:p>
           <a:p>
             <a:pPr algn="l" indent="0" marL="0">
               <a:buNone/>
             </a:pPr>
             <a:r>
-              <a:rPr lang="en-US" sz="800" dirty="0">
+              <a:rPr lang="en-US" sz="900" dirty="0">
                 <a:solidFill>
                   <a:srgbClr val="5B6574"/>
                 </a:solidFill>
               </a:rPr>
               <a:t>Image: Photohound, Public domain, via Wikimedia Commons</a:t>
             </a:r>
-            <a:endParaRPr lang="en-US" sz="1100" dirty="0"/>
+            <a:endParaRPr lang="en-US" sz="1300" dirty="0"/>
           </a:p>
         </p:txBody>
       </p:sp>
@@ -6276,8 +6248,8 @@
         </p:nvSpPr>
         <p:spPr>
           <a:xfrm>
-            <a:off x="548640" y="1325880"/>
-            <a:ext cx="5669280" cy="457200"/>
+            <a:off x="548640" y="1280160"/>
+            <a:ext cx="5486400" cy="411480"/>
           </a:xfrm>
           <a:prstGeom prst="rect">
             <a:avLst/>
@@ -6293,14 +6265,14 @@
               <a:buNone/>
             </a:pPr>
             <a:r>
-              <a:rPr lang="en-US" sz="2000" b="1" dirty="0">
+              <a:rPr lang="en-US" sz="2200" b="1" dirty="0">
                 <a:solidFill>
                   <a:srgbClr val="7B3A8E"/>
                 </a:solidFill>
               </a:rPr>
               <a:t>Today I can ...</a:t>
             </a:r>
-            <a:endParaRPr lang="en-US" sz="2000" dirty="0"/>
+            <a:endParaRPr lang="en-US" sz="2200" dirty="0"/>
           </a:p>
         </p:txBody>
       </p:sp>
@@ -6312,8 +6284,8 @@
         </p:nvSpPr>
         <p:spPr>
           <a:xfrm>
-            <a:off x="594360" y="1947672"/>
-            <a:ext cx="292608" cy="292608"/>
+            <a:off x="594360" y="1810512"/>
+            <a:ext cx="310896" cy="310896"/>
           </a:xfrm>
           <a:prstGeom prst="rect">
             <a:avLst/>
@@ -6337,33 +6309,31 @@
         </p:nvSpPr>
         <p:spPr>
           <a:xfrm>
-            <a:off x="1051560" y="1874520"/>
-            <a:ext cx="5120640" cy="868680"/>
-          </a:xfrm>
-          <a:prstGeom prst="rect">
-            <a:avLst/>
-          </a:prstGeom>
-          <a:noFill/>
-          <a:ln/>
-        </p:spPr>
-        <p:txBody>
-          <a:bodyPr wrap="square" lIns="0" tIns="0" rIns="0" bIns="0" rtlCol="0" anchor="t">
-            <a:normAutofit/>
-          </a:bodyPr>
+            <a:off x="1097280" y="1737360"/>
+            <a:ext cx="10332720" cy="868680"/>
+          </a:xfrm>
+          <a:prstGeom prst="rect">
+            <a:avLst/>
+          </a:prstGeom>
+          <a:noFill/>
+          <a:ln/>
+        </p:spPr>
+        <p:txBody>
+          <a:bodyPr wrap="square" lIns="0" tIns="0" rIns="0" bIns="0" rtlCol="0" anchor="t"/>
           <a:lstStyle/>
           <a:p>
             <a:pPr indent="0" marL="0">
               <a:buNone/>
             </a:pPr>
             <a:r>
-              <a:rPr lang="en-US" sz="1600" dirty="0">
+              <a:rPr lang="en-US" sz="2000" dirty="0">
                 <a:solidFill>
                   <a:srgbClr val="141B26"/>
                 </a:solidFill>
               </a:rPr>
               <a:t>I can describe how stomata and guard cells control gas exchange in a leaf.</a:t>
             </a:r>
-            <a:endParaRPr lang="en-US" sz="1600" dirty="0"/>
+            <a:endParaRPr lang="en-US" sz="2000" dirty="0"/>
           </a:p>
         </p:txBody>
       </p:sp>
@@ -6375,8 +6345,8 @@
         </p:nvSpPr>
         <p:spPr>
           <a:xfrm>
-            <a:off x="594360" y="2907792"/>
-            <a:ext cx="292608" cy="292608"/>
+            <a:off x="594360" y="2679192"/>
+            <a:ext cx="310896" cy="310896"/>
           </a:xfrm>
           <a:prstGeom prst="rect">
             <a:avLst/>
@@ -6400,33 +6370,31 @@
         </p:nvSpPr>
         <p:spPr>
           <a:xfrm>
-            <a:off x="1051560" y="2834640"/>
-            <a:ext cx="5120640" cy="868680"/>
-          </a:xfrm>
-          <a:prstGeom prst="rect">
-            <a:avLst/>
-          </a:prstGeom>
-          <a:noFill/>
-          <a:ln/>
-        </p:spPr>
-        <p:txBody>
-          <a:bodyPr wrap="square" lIns="0" tIns="0" rIns="0" bIns="0" rtlCol="0" anchor="t">
-            <a:normAutofit/>
-          </a:bodyPr>
+            <a:off x="1097280" y="2606040"/>
+            <a:ext cx="10332720" cy="868680"/>
+          </a:xfrm>
+          <a:prstGeom prst="rect">
+            <a:avLst/>
+          </a:prstGeom>
+          <a:noFill/>
+          <a:ln/>
+        </p:spPr>
+        <p:txBody>
+          <a:bodyPr wrap="square" lIns="0" tIns="0" rIns="0" bIns="0" rtlCol="0" anchor="t"/>
           <a:lstStyle/>
           <a:p>
             <a:pPr indent="0" marL="0">
               <a:buNone/>
             </a:pPr>
             <a:r>
-              <a:rPr lang="en-US" sz="1600" dirty="0">
+              <a:rPr lang="en-US" sz="2000" dirty="0">
                 <a:solidFill>
                   <a:srgbClr val="141B26"/>
                 </a:solidFill>
               </a:rPr>
               <a:t>I can explain how temperature and concentration difference affect diffusion, and why a plant loses more water on a hot day.</a:t>
             </a:r>
-            <a:endParaRPr lang="en-US" sz="1600" dirty="0"/>
+            <a:endParaRPr lang="en-US" sz="2000" dirty="0"/>
           </a:p>
         </p:txBody>
       </p:sp>
@@ -6438,8 +6406,8 @@
         </p:nvSpPr>
         <p:spPr>
           <a:xfrm>
-            <a:off x="6583680" y="1325880"/>
-            <a:ext cx="5029200" cy="457200"/>
+            <a:off x="548640" y="3611880"/>
+            <a:ext cx="5486400" cy="411480"/>
           </a:xfrm>
           <a:prstGeom prst="rect">
             <a:avLst/>
@@ -6455,14 +6423,14 @@
               <a:buNone/>
             </a:pPr>
             <a:r>
-              <a:rPr lang="en-US" sz="2000" b="1" dirty="0">
+              <a:rPr lang="en-US" sz="2200" b="1" dirty="0">
                 <a:solidFill>
                   <a:srgbClr val="7B3A8E"/>
                 </a:solidFill>
               </a:rPr>
               <a:t>Key words today</a:t>
             </a:r>
-            <a:endParaRPr lang="en-US" sz="2000" dirty="0"/>
+            <a:endParaRPr lang="en-US" sz="2200" dirty="0"/>
           </a:p>
         </p:txBody>
       </p:sp>
@@ -6474,298 +6442,259 @@
         </p:nvSpPr>
         <p:spPr>
           <a:xfrm>
-            <a:off x="6583680" y="1874520"/>
-            <a:ext cx="5029200" cy="4023360"/>
-          </a:xfrm>
-          <a:prstGeom prst="rect">
-            <a:avLst/>
-          </a:prstGeom>
-          <a:noFill/>
-          <a:ln/>
-        </p:spPr>
-        <p:txBody>
-          <a:bodyPr wrap="square" lIns="0" tIns="0" rIns="0" bIns="0" rtlCol="0" anchor="t">
-            <a:normAutofit/>
-          </a:bodyPr>
+            <a:off x="548640" y="4069080"/>
+            <a:ext cx="3515258" cy="1920240"/>
+          </a:xfrm>
+          <a:prstGeom prst="rect">
+            <a:avLst/>
+          </a:prstGeom>
+          <a:noFill/>
+          <a:ln/>
+        </p:spPr>
+        <p:txBody>
+          <a:bodyPr wrap="square" lIns="0" tIns="0" rIns="0" bIns="0" rtlCol="0" anchor="t"/>
+          <a:lstStyle/>
+          <a:p>
+            <a:pPr marL="304800" indent="-304800">
+              <a:spcAft>
+                <a:spcPts val="600"/>
+              </a:spcAft>
+              <a:buSzPct val="100000"/>
+              <a:buChar char="•"/>
+            </a:pPr>
+            <a:r>
+              <a:rPr lang="en-US" sz="2200" b="1" dirty="0">
+                <a:solidFill>
+                  <a:srgbClr val="0F2A5F"/>
+                </a:solidFill>
+              </a:rPr>
+              <a:t>stomata</a:t>
+            </a:r>
+            <a:endParaRPr lang="en-US" sz="2200" dirty="0"/>
+          </a:p>
+          <a:p>
+            <a:pPr marL="304800" indent="-304800">
+              <a:spcAft>
+                <a:spcPts val="600"/>
+              </a:spcAft>
+              <a:buSzPct val="100000"/>
+              <a:buChar char="•"/>
+            </a:pPr>
+            <a:r>
+              <a:rPr lang="en-US" sz="2200" b="1" dirty="0">
+                <a:solidFill>
+                  <a:srgbClr val="0F2A5F"/>
+                </a:solidFill>
+              </a:rPr>
+              <a:t>guard cell</a:t>
+            </a:r>
+            <a:endParaRPr lang="en-US" sz="2200" dirty="0"/>
+          </a:p>
+          <a:p>
+            <a:pPr marL="304800" indent="-304800">
+              <a:spcAft>
+                <a:spcPts val="600"/>
+              </a:spcAft>
+              <a:buSzPct val="100000"/>
+              <a:buChar char="•"/>
+            </a:pPr>
+            <a:r>
+              <a:rPr lang="en-US" sz="2200" b="1" dirty="0">
+                <a:solidFill>
+                  <a:srgbClr val="0F2A5F"/>
+                </a:solidFill>
+              </a:rPr>
+              <a:t>diffusion</a:t>
+            </a:r>
+            <a:endParaRPr lang="en-US" sz="2200" dirty="0"/>
+          </a:p>
+        </p:txBody>
+      </p:sp>
+      <p:sp>
+        <p:nvSpPr>
+          <p:cNvPr id="12" name="Text 10"/>
+          <p:cNvSpPr txBox="1"/>
+          <p:nvPr/>
+        </p:nvSpPr>
+        <p:spPr>
+          <a:xfrm>
+            <a:off x="4338218" y="4069080"/>
+            <a:ext cx="3515258" cy="1920240"/>
+          </a:xfrm>
+          <a:prstGeom prst="rect">
+            <a:avLst/>
+          </a:prstGeom>
+          <a:noFill/>
+          <a:ln/>
+        </p:spPr>
+        <p:txBody>
+          <a:bodyPr wrap="square" lIns="0" tIns="0" rIns="0" bIns="0" rtlCol="0" anchor="t"/>
+          <a:lstStyle/>
+          <a:p>
+            <a:pPr marL="304800" indent="-304800">
+              <a:spcAft>
+                <a:spcPts val="600"/>
+              </a:spcAft>
+              <a:buSzPct val="100000"/>
+              <a:buChar char="•"/>
+            </a:pPr>
+            <a:r>
+              <a:rPr lang="en-US" sz="2200" b="1" dirty="0">
+                <a:solidFill>
+                  <a:srgbClr val="0F2A5F"/>
+                </a:solidFill>
+              </a:rPr>
+              <a:t>concentration</a:t>
+            </a:r>
+            <a:endParaRPr lang="en-US" sz="2200" dirty="0"/>
+          </a:p>
+          <a:p>
+            <a:pPr marL="304800" indent="-304800">
+              <a:spcAft>
+                <a:spcPts val="600"/>
+              </a:spcAft>
+              <a:buSzPct val="100000"/>
+              <a:buChar char="•"/>
+            </a:pPr>
+            <a:r>
+              <a:rPr lang="en-US" sz="2200" b="1" dirty="0">
+                <a:solidFill>
+                  <a:srgbClr val="0F2A5F"/>
+                </a:solidFill>
+              </a:rPr>
+              <a:t>gas exchange</a:t>
+            </a:r>
+            <a:endParaRPr lang="en-US" sz="2200" dirty="0"/>
+          </a:p>
+          <a:p>
+            <a:pPr marL="304800" indent="-304800">
+              <a:spcAft>
+                <a:spcPts val="600"/>
+              </a:spcAft>
+              <a:buSzPct val="100000"/>
+              <a:buChar char="•"/>
+            </a:pPr>
+            <a:r>
+              <a:rPr lang="en-US" sz="2200" b="1" dirty="0">
+                <a:solidFill>
+                  <a:srgbClr val="0F2A5F"/>
+                </a:solidFill>
+              </a:rPr>
+              <a:t>water vapour</a:t>
+            </a:r>
+            <a:endParaRPr lang="en-US" sz="2200" dirty="0"/>
+          </a:p>
+        </p:txBody>
+      </p:sp>
+      <p:sp>
+        <p:nvSpPr>
+          <p:cNvPr id="13" name="Text 11"/>
+          <p:cNvSpPr txBox="1"/>
+          <p:nvPr/>
+        </p:nvSpPr>
+        <p:spPr>
+          <a:xfrm>
+            <a:off x="8127797" y="4069080"/>
+            <a:ext cx="3515258" cy="1920240"/>
+          </a:xfrm>
+          <a:prstGeom prst="rect">
+            <a:avLst/>
+          </a:prstGeom>
+          <a:noFill/>
+          <a:ln/>
+        </p:spPr>
+        <p:txBody>
+          <a:bodyPr wrap="square" lIns="0" tIns="0" rIns="0" bIns="0" rtlCol="0" anchor="t"/>
+          <a:lstStyle/>
+          <a:p>
+            <a:pPr marL="304800" indent="-304800">
+              <a:spcAft>
+                <a:spcPts val="600"/>
+              </a:spcAft>
+              <a:buSzPct val="100000"/>
+              <a:buChar char="•"/>
+            </a:pPr>
+            <a:r>
+              <a:rPr lang="en-US" sz="2200" b="1" dirty="0">
+                <a:solidFill>
+                  <a:srgbClr val="0F2A5F"/>
+                </a:solidFill>
+              </a:rPr>
+              <a:t>evaporation</a:t>
+            </a:r>
+            <a:endParaRPr lang="en-US" sz="2200" dirty="0"/>
+          </a:p>
+          <a:p>
+            <a:pPr marL="304800" indent="-304800">
+              <a:spcAft>
+                <a:spcPts val="600"/>
+              </a:spcAft>
+              <a:buSzPct val="100000"/>
+              <a:buChar char="•"/>
+            </a:pPr>
+            <a:r>
+              <a:rPr lang="en-US" sz="2200" b="1" dirty="0">
+                <a:solidFill>
+                  <a:srgbClr val="0F2A5F"/>
+                </a:solidFill>
+              </a:rPr>
+              <a:t>wilt</a:t>
+            </a:r>
+            <a:endParaRPr lang="en-US" sz="2200" dirty="0"/>
+          </a:p>
+          <a:p>
+            <a:pPr marL="304800" indent="-304800">
+              <a:spcAft>
+                <a:spcPts val="600"/>
+              </a:spcAft>
+              <a:buSzPct val="100000"/>
+              <a:buChar char="•"/>
+            </a:pPr>
+            <a:r>
+              <a:rPr lang="en-US" sz="2200" b="1" dirty="0">
+                <a:solidFill>
+                  <a:srgbClr val="0F2A5F"/>
+                </a:solidFill>
+              </a:rPr>
+              <a:t>epidermis</a:t>
+            </a:r>
+            <a:endParaRPr lang="en-US" sz="2200" dirty="0"/>
+          </a:p>
+        </p:txBody>
+      </p:sp>
+      <p:sp>
+        <p:nvSpPr>
+          <p:cNvPr id="14" name="Text 12"/>
+          <p:cNvSpPr txBox="1"/>
+          <p:nvPr/>
+        </p:nvSpPr>
+        <p:spPr>
+          <a:xfrm>
+            <a:off x="548640" y="6035040"/>
+            <a:ext cx="10881360" cy="320040"/>
+          </a:xfrm>
+          <a:prstGeom prst="rect">
+            <a:avLst/>
+          </a:prstGeom>
+          <a:noFill/>
+          <a:ln/>
+        </p:spPr>
+        <p:txBody>
+          <a:bodyPr wrap="square" lIns="0" tIns="0" rIns="0" bIns="0" rtlCol="0" anchor="ctr"/>
           <a:lstStyle/>
           <a:p>
             <a:pPr indent="0" marL="0">
-              <a:spcAft>
-                <a:spcPts val="500"/>
-              </a:spcAft>
-              <a:buNone/>
-            </a:pPr>
-            <a:r>
-              <a:rPr lang="en-US" sz="1300" b="1" dirty="0">
-                <a:solidFill>
-                  <a:srgbClr val="0F2A5F"/>
-                </a:solidFill>
-              </a:rPr>
-              <a:t>stomata</a:t>
-            </a:r>
-            <a:pPr indent="0" marL="0">
-              <a:spcAft>
-                <a:spcPts val="500"/>
-              </a:spcAft>
-              <a:buNone/>
-            </a:pPr>
-            <a:r>
-              <a:rPr lang="en-US" sz="1300" dirty="0">
-                <a:solidFill>
-                  <a:srgbClr val="141B26"/>
-                </a:solidFill>
-              </a:rPr>
-              <a:t>  tiny holes in a leaf that let gases in and out (one is a stoma)</a:t>
-            </a:r>
-            <a:endParaRPr lang="en-US" sz="1300" dirty="0"/>
-          </a:p>
-          <a:p>
-            <a:pPr indent="0" marL="0">
-              <a:spcAft>
-                <a:spcPts val="500"/>
-              </a:spcAft>
-              <a:buNone/>
-            </a:pPr>
-            <a:r>
-              <a:rPr lang="en-US" sz="1300" b="1" dirty="0">
-                <a:solidFill>
-                  <a:srgbClr val="0F2A5F"/>
-                </a:solidFill>
-              </a:rPr>
-              <a:t>guard cell</a:t>
-            </a:r>
-            <a:pPr indent="0" marL="0">
-              <a:spcAft>
-                <a:spcPts val="500"/>
-              </a:spcAft>
-              <a:buNone/>
-            </a:pPr>
-            <a:r>
-              <a:rPr lang="en-US" sz="1300" dirty="0">
-                <a:solidFill>
-                  <a:srgbClr val="141B26"/>
-                </a:solidFill>
-              </a:rPr>
-              <a:t>  one of the pair of cells that opens and closes a stoma</a:t>
-            </a:r>
-            <a:endParaRPr lang="en-US" sz="1300" dirty="0"/>
-          </a:p>
-          <a:p>
-            <a:pPr indent="0" marL="0">
-              <a:spcAft>
-                <a:spcPts val="500"/>
-              </a:spcAft>
-              <a:buNone/>
-            </a:pPr>
-            <a:r>
-              <a:rPr lang="en-US" sz="1300" b="1" dirty="0">
-                <a:solidFill>
-                  <a:srgbClr val="0F2A5F"/>
-                </a:solidFill>
-              </a:rPr>
-              <a:t>diffusion</a:t>
-            </a:r>
-            <a:pPr indent="0" marL="0">
-              <a:spcAft>
-                <a:spcPts val="500"/>
-              </a:spcAft>
-              <a:buNone/>
-            </a:pPr>
-            <a:r>
-              <a:rPr lang="en-US" sz="1300" dirty="0">
-                <a:solidFill>
-                  <a:srgbClr val="141B26"/>
-                </a:solidFill>
-              </a:rPr>
-              <a:t>  the overall movement of particles from where they are more concentrated to where they are less concentrated</a:t>
-            </a:r>
-            <a:endParaRPr lang="en-US" sz="1300" dirty="0"/>
-          </a:p>
-          <a:p>
-            <a:pPr indent="0" marL="0">
-              <a:spcAft>
-                <a:spcPts val="500"/>
-              </a:spcAft>
-              <a:buNone/>
-            </a:pPr>
-            <a:r>
-              <a:rPr lang="en-US" sz="1300" b="1" dirty="0">
-                <a:solidFill>
-                  <a:srgbClr val="0F2A5F"/>
-                </a:solidFill>
-              </a:rPr>
-              <a:t>concentration</a:t>
-            </a:r>
-            <a:pPr indent="0" marL="0">
-              <a:spcAft>
-                <a:spcPts val="500"/>
-              </a:spcAft>
-              <a:buNone/>
-            </a:pPr>
-            <a:r>
-              <a:rPr lang="en-US" sz="1300" dirty="0">
-                <a:solidFill>
-                  <a:srgbClr val="141B26"/>
-                </a:solidFill>
-              </a:rPr>
-              <a:t>  how many particles of a substance there are in a certain space</a:t>
-            </a:r>
-            <a:endParaRPr lang="en-US" sz="1300" dirty="0"/>
-          </a:p>
-          <a:p>
-            <a:pPr indent="0" marL="0">
-              <a:spcAft>
-                <a:spcPts val="500"/>
-              </a:spcAft>
-              <a:buNone/>
-            </a:pPr>
-            <a:r>
-              <a:rPr lang="en-US" sz="1300" b="1" dirty="0">
-                <a:solidFill>
-                  <a:srgbClr val="0F2A5F"/>
-                </a:solidFill>
-              </a:rPr>
-              <a:t>gas exchange</a:t>
-            </a:r>
-            <a:pPr indent="0" marL="0">
-              <a:spcAft>
-                <a:spcPts val="500"/>
-              </a:spcAft>
-              <a:buNone/>
-            </a:pPr>
-            <a:r>
-              <a:rPr lang="en-US" sz="1300" dirty="0">
-                <a:solidFill>
-                  <a:srgbClr val="141B26"/>
-                </a:solidFill>
-              </a:rPr>
-              <a:t>  the swapping of gases between a leaf and the air</a:t>
-            </a:r>
-            <a:endParaRPr lang="en-US" sz="1300" dirty="0"/>
-          </a:p>
-          <a:p>
-            <a:pPr indent="0" marL="0">
-              <a:spcAft>
-                <a:spcPts val="500"/>
-              </a:spcAft>
-              <a:buNone/>
-            </a:pPr>
-            <a:r>
-              <a:rPr lang="en-US" sz="1300" b="1" dirty="0">
-                <a:solidFill>
-                  <a:srgbClr val="0F2A5F"/>
-                </a:solidFill>
-              </a:rPr>
-              <a:t>water vapour</a:t>
-            </a:r>
-            <a:pPr indent="0" marL="0">
-              <a:spcAft>
-                <a:spcPts val="500"/>
-              </a:spcAft>
-              <a:buNone/>
-            </a:pPr>
-            <a:r>
-              <a:rPr lang="en-US" sz="1300" dirty="0">
-                <a:solidFill>
-                  <a:srgbClr val="141B26"/>
-                </a:solidFill>
-              </a:rPr>
-              <a:t>  water in the form of a gas</a:t>
-            </a:r>
-            <a:endParaRPr lang="en-US" sz="1300" dirty="0"/>
-          </a:p>
-          <a:p>
-            <a:pPr indent="0" marL="0">
-              <a:spcAft>
-                <a:spcPts val="500"/>
-              </a:spcAft>
-              <a:buNone/>
-            </a:pPr>
-            <a:r>
-              <a:rPr lang="en-US" sz="1300" b="1" dirty="0">
-                <a:solidFill>
-                  <a:srgbClr val="0F2A5F"/>
-                </a:solidFill>
-              </a:rPr>
-              <a:t>evaporation</a:t>
-            </a:r>
-            <a:pPr indent="0" marL="0">
-              <a:spcAft>
-                <a:spcPts val="500"/>
-              </a:spcAft>
-              <a:buNone/>
-            </a:pPr>
-            <a:r>
-              <a:rPr lang="en-US" sz="1300" dirty="0">
-                <a:solidFill>
-                  <a:srgbClr val="141B26"/>
-                </a:solidFill>
-              </a:rPr>
-              <a:t>  a liquid turning into a gas</a:t>
-            </a:r>
-            <a:endParaRPr lang="en-US" sz="1300" dirty="0"/>
-          </a:p>
-          <a:p>
-            <a:pPr indent="0" marL="0">
-              <a:spcAft>
-                <a:spcPts val="500"/>
-              </a:spcAft>
-              <a:buNone/>
-            </a:pPr>
-            <a:r>
-              <a:rPr lang="en-US" sz="1300" b="1" dirty="0">
-                <a:solidFill>
-                  <a:srgbClr val="0F2A5F"/>
-                </a:solidFill>
-              </a:rPr>
-              <a:t>wilt</a:t>
-            </a:r>
-            <a:pPr indent="0" marL="0">
-              <a:spcAft>
-                <a:spcPts val="500"/>
-              </a:spcAft>
-              <a:buNone/>
-            </a:pPr>
-            <a:r>
-              <a:rPr lang="en-US" sz="1300" dirty="0">
-                <a:solidFill>
-                  <a:srgbClr val="141B26"/>
-                </a:solidFill>
-              </a:rPr>
-              <a:t>  to droop because the cells have too little water</a:t>
-            </a:r>
-            <a:endParaRPr lang="en-US" sz="1300" dirty="0"/>
-          </a:p>
-          <a:p>
-            <a:pPr indent="0" marL="0">
-              <a:spcAft>
-                <a:spcPts val="500"/>
-              </a:spcAft>
-              <a:buNone/>
-            </a:pPr>
-            <a:r>
-              <a:rPr lang="en-US" sz="1300" b="1" dirty="0">
-                <a:solidFill>
-                  <a:srgbClr val="0F2A5F"/>
-                </a:solidFill>
-              </a:rPr>
-              <a:t>epidermis</a:t>
-            </a:r>
-            <a:pPr indent="0" marL="0">
-              <a:spcAft>
-                <a:spcPts val="500"/>
-              </a:spcAft>
-              <a:buNone/>
-            </a:pPr>
-            <a:r>
-              <a:rPr lang="en-US" sz="1300" dirty="0">
-                <a:solidFill>
-                  <a:srgbClr val="141B26"/>
-                </a:solidFill>
-              </a:rPr>
-              <a:t>  the outer layer of cells of a leaf</a:t>
-            </a:r>
-            <a:endParaRPr lang="en-US" sz="1300" dirty="0"/>
+              <a:buNone/>
+            </a:pPr>
+            <a:r>
+              <a:rPr lang="en-US" sz="1400" i="1" dirty="0">
+                <a:solidFill>
+                  <a:srgbClr val="5B6574"/>
+                </a:solidFill>
+              </a:rPr>
+              <a:t>Meanings are in the key words box on your worksheet.</a:t>
+            </a:r>
+            <a:endParaRPr lang="en-US" sz="1400" dirty="0"/>
           </a:p>
         </p:txBody>
       </p:sp>
@@ -6949,32 +6878,30 @@
         <p:spPr>
           <a:xfrm>
             <a:off x="548640" y="1371600"/>
-            <a:ext cx="10881360" cy="2377440"/>
-          </a:xfrm>
-          <a:prstGeom prst="rect">
-            <a:avLst/>
-          </a:prstGeom>
-          <a:noFill/>
-          <a:ln/>
-        </p:spPr>
-        <p:txBody>
-          <a:bodyPr wrap="square" lIns="0" tIns="0" rIns="0" bIns="0" rtlCol="0" anchor="t">
-            <a:normAutofit/>
-          </a:bodyPr>
+            <a:ext cx="10881360" cy="2651760"/>
+          </a:xfrm>
+          <a:prstGeom prst="rect">
+            <a:avLst/>
+          </a:prstGeom>
+          <a:noFill/>
+          <a:ln/>
+        </p:spPr>
+        <p:txBody>
+          <a:bodyPr wrap="square" lIns="0" tIns="0" rIns="0" bIns="0" rtlCol="0" anchor="t"/>
           <a:lstStyle/>
           <a:p>
             <a:pPr indent="0" marL="0">
               <a:buNone/>
             </a:pPr>
             <a:r>
-              <a:rPr lang="en-US" sz="2800" b="1" dirty="0">
+              <a:rPr lang="en-US" sz="3000" b="1" dirty="0">
                 <a:solidFill>
                   <a:srgbClr val="0F2A5F"/>
                 </a:solidFill>
               </a:rPr>
               <a:t>Two identical pot plants were given the same light and the same water. One was kept in a cool room and one in a hot room. The one in the hot room wilted. Why?</a:t>
             </a:r>
-            <a:endParaRPr lang="en-US" sz="2800" dirty="0"/>
+            <a:endParaRPr lang="en-US" sz="3000" dirty="0"/>
           </a:p>
         </p:txBody>
       </p:sp>
@@ -6986,19 +6913,17 @@
         </p:nvSpPr>
         <p:spPr>
           <a:xfrm>
-            <a:off x="548640" y="3794760"/>
-            <a:ext cx="10881360" cy="2103120"/>
-          </a:xfrm>
-          <a:prstGeom prst="rect">
-            <a:avLst/>
-          </a:prstGeom>
-          <a:noFill/>
-          <a:ln/>
-        </p:spPr>
-        <p:txBody>
-          <a:bodyPr wrap="square" lIns="0" tIns="0" rIns="0" bIns="0" rtlCol="0" anchor="t">
-            <a:normAutofit/>
-          </a:bodyPr>
+            <a:off x="548640" y="4114800"/>
+            <a:ext cx="10881360" cy="1828800"/>
+          </a:xfrm>
+          <a:prstGeom prst="rect">
+            <a:avLst/>
+          </a:prstGeom>
+          <a:noFill/>
+          <a:ln/>
+        </p:spPr>
+        <p:txBody>
+          <a:bodyPr wrap="square" lIns="0" tIns="0" rIns="0" bIns="0" rtlCol="0" anchor="t"/>
           <a:lstStyle/>
           <a:p>
             <a:pPr indent="0" marL="0">
@@ -7008,14 +6933,14 @@
               <a:buNone/>
             </a:pPr>
             <a:r>
-              <a:rPr lang="en-US" sz="1600" dirty="0">
+              <a:rPr lang="en-US" sz="2000" dirty="0">
                 <a:solidFill>
                   <a:srgbClr val="141B26"/>
                 </a:solidFill>
               </a:rPr>
               <a:t>Talk to a partner. We come back to this at the end.</a:t>
             </a:r>
-            <a:endParaRPr lang="en-US" sz="1600" dirty="0"/>
+            <a:endParaRPr lang="en-US" sz="2000" dirty="0"/>
           </a:p>
         </p:txBody>
       </p:sp>
@@ -7198,8 +7123,8 @@
         </p:nvSpPr>
         <p:spPr>
           <a:xfrm>
-            <a:off x="548640" y="6053328"/>
-            <a:ext cx="9601200" cy="292608"/>
+            <a:off x="548640" y="6035040"/>
+            <a:ext cx="9601200" cy="310896"/>
           </a:xfrm>
           <a:prstGeom prst="rect">
             <a:avLst/>
@@ -7215,7 +7140,7 @@
               <a:buNone/>
             </a:pPr>
             <a:r>
-              <a:rPr lang="en-US" sz="1200" b="1" dirty="0">
+              <a:rPr lang="en-US" sz="1400" b="1" dirty="0">
                 <a:solidFill>
                   <a:srgbClr val="7B3A8E"/>
                 </a:solidFill>
@@ -7226,14 +7151,14 @@
               <a:buNone/>
             </a:pPr>
             <a:r>
-              <a:rPr lang="en-US" sz="1200" dirty="0">
+              <a:rPr lang="en-US" sz="1400" dirty="0">
                 <a:solidFill>
                   <a:srgbClr val="7B3A8E"/>
                 </a:solidFill>
               </a:rPr>
               <a:t>stomata   ·   guard cell   ·   epidermis</a:t>
             </a:r>
-            <a:endParaRPr lang="en-US" sz="1200" dirty="0"/>
+            <a:endParaRPr lang="en-US" sz="1400" dirty="0"/>
           </a:p>
         </p:txBody>
       </p:sp>
@@ -7262,14 +7187,14 @@
               <a:buNone/>
             </a:pPr>
             <a:r>
-              <a:rPr lang="en-US" sz="1600" dirty="0">
+              <a:rPr lang="en-US" sz="1500" dirty="0">
                 <a:solidFill>
                   <a:srgbClr val="141B26"/>
                 </a:solidFill>
               </a:rPr>
               <a:t>Stomata are tiny holes in the epidermis, mostly on the lower surface. Each is opened and closed by a pair of guard cells.</a:t>
             </a:r>
-            <a:endParaRPr lang="en-US" sz="1600" dirty="0"/>
+            <a:endParaRPr lang="en-US" sz="1500" dirty="0"/>
           </a:p>
         </p:txBody>
       </p:sp>
@@ -7340,16 +7265,14 @@
           <a:ln/>
         </p:spPr>
         <p:txBody>
-          <a:bodyPr wrap="square" lIns="0" tIns="0" rIns="0" bIns="0" rtlCol="0" anchor="ctr">
-            <a:normAutofit/>
-          </a:bodyPr>
+          <a:bodyPr wrap="square" lIns="0" tIns="0" rIns="0" bIns="0" rtlCol="0" anchor="ctr"/>
           <a:lstStyle/>
           <a:p>
             <a:pPr indent="0" marL="0">
               <a:buNone/>
             </a:pPr>
             <a:r>
-              <a:rPr lang="en-US" sz="1400" b="1" dirty="0">
+              <a:rPr lang="en-US" sz="1700" b="1" dirty="0">
                 <a:solidFill>
                   <a:srgbClr val="7B3A8E"/>
                 </a:solidFill>
@@ -7360,14 +7283,14 @@
               <a:buNone/>
             </a:pPr>
             <a:r>
-              <a:rPr lang="en-US" sz="1400" dirty="0">
+              <a:rPr lang="en-US" sz="1700" dirty="0">
                 <a:solidFill>
                   <a:srgbClr val="141B26"/>
                 </a:solidFill>
               </a:rPr>
               <a:t>Open in the light, when the plant needs carbon dioxide for photosynthesis. Shut at night, which saves water.</a:t>
             </a:r>
-            <a:endParaRPr lang="en-US" sz="1400" dirty="0"/>
+            <a:endParaRPr lang="en-US" sz="1700" dirty="0"/>
           </a:p>
         </p:txBody>
       </p:sp>
@@ -7550,8 +7473,8 @@
         </p:nvSpPr>
         <p:spPr>
           <a:xfrm>
-            <a:off x="548640" y="6053328"/>
-            <a:ext cx="9601200" cy="292608"/>
+            <a:off x="548640" y="6035040"/>
+            <a:ext cx="9601200" cy="310896"/>
           </a:xfrm>
           <a:prstGeom prst="rect">
             <a:avLst/>
@@ -7567,7 +7490,7 @@
               <a:buNone/>
             </a:pPr>
             <a:r>
-              <a:rPr lang="en-US" sz="1200" b="1" dirty="0">
+              <a:rPr lang="en-US" sz="1400" b="1" dirty="0">
                 <a:solidFill>
                   <a:srgbClr val="7B3A8E"/>
                 </a:solidFill>
@@ -7578,14 +7501,14 @@
               <a:buNone/>
             </a:pPr>
             <a:r>
-              <a:rPr lang="en-US" sz="1200" dirty="0">
+              <a:rPr lang="en-US" sz="1400" dirty="0">
                 <a:solidFill>
                   <a:srgbClr val="7B3A8E"/>
                 </a:solidFill>
               </a:rPr>
               <a:t>diffusion   ·   concentration</a:t>
             </a:r>
-            <a:endParaRPr lang="en-US" sz="1200" dirty="0"/>
+            <a:endParaRPr lang="en-US" sz="1400" dirty="0"/>
           </a:p>
         </p:txBody>
       </p:sp>
@@ -7614,14 +7537,14 @@
               <a:buNone/>
             </a:pPr>
             <a:r>
-              <a:rPr lang="en-US" sz="1600" dirty="0">
+              <a:rPr lang="en-US" sz="1500" dirty="0">
                 <a:solidFill>
                   <a:srgbClr val="141B26"/>
                 </a:solidFill>
               </a:rPr>
               <a:t>Particles move randomly all the time. Overall they spread from where they are more concentrated to where they are less concentrated.</a:t>
             </a:r>
-            <a:endParaRPr lang="en-US" sz="1600" dirty="0"/>
+            <a:endParaRPr lang="en-US" sz="1500" dirty="0"/>
           </a:p>
         </p:txBody>
       </p:sp>
@@ -7692,16 +7615,14 @@
           <a:ln/>
         </p:spPr>
         <p:txBody>
-          <a:bodyPr wrap="square" lIns="0" tIns="0" rIns="0" bIns="0" rtlCol="0" anchor="ctr">
-            <a:normAutofit/>
-          </a:bodyPr>
+          <a:bodyPr wrap="square" lIns="0" tIns="0" rIns="0" bIns="0" rtlCol="0" anchor="ctr"/>
           <a:lstStyle/>
           <a:p>
             <a:pPr indent="0" marL="0">
               <a:buNone/>
             </a:pPr>
             <a:r>
-              <a:rPr lang="en-US" sz="1400" b="1" dirty="0">
+              <a:rPr lang="en-US" sz="1700" b="1" dirty="0">
                 <a:solidFill>
                   <a:srgbClr val="7B3A8E"/>
                 </a:solidFill>
@@ -7712,14 +7633,14 @@
               <a:buNone/>
             </a:pPr>
             <a:r>
-              <a:rPr lang="en-US" sz="1400" dirty="0">
+              <a:rPr lang="en-US" sz="1700" dirty="0">
                 <a:solidFill>
                   <a:srgbClr val="141B26"/>
                 </a:solidFill>
               </a:rPr>
               <a:t>Diffusion is faster at higher temperatures (particles move faster) and when the concentration difference is bigger.</a:t>
             </a:r>
-            <a:endParaRPr lang="en-US" sz="1400" dirty="0"/>
+            <a:endParaRPr lang="en-US" sz="1700" dirty="0"/>
           </a:p>
         </p:txBody>
       </p:sp>
@@ -7902,8 +7823,8 @@
         </p:nvSpPr>
         <p:spPr>
           <a:xfrm>
-            <a:off x="548640" y="6053328"/>
-            <a:ext cx="9601200" cy="292608"/>
+            <a:off x="548640" y="6035040"/>
+            <a:ext cx="9601200" cy="310896"/>
           </a:xfrm>
           <a:prstGeom prst="rect">
             <a:avLst/>
@@ -7919,7 +7840,7 @@
               <a:buNone/>
             </a:pPr>
             <a:r>
-              <a:rPr lang="en-US" sz="1200" b="1" dirty="0">
+              <a:rPr lang="en-US" sz="1400" b="1" dirty="0">
                 <a:solidFill>
                   <a:srgbClr val="7B3A8E"/>
                 </a:solidFill>
@@ -7930,14 +7851,14 @@
               <a:buNone/>
             </a:pPr>
             <a:r>
-              <a:rPr lang="en-US" sz="1200" dirty="0">
+              <a:rPr lang="en-US" sz="1400" dirty="0">
                 <a:solidFill>
                   <a:srgbClr val="7B3A8E"/>
                 </a:solidFill>
               </a:rPr>
               <a:t>gas exchange   ·   stomata   ·   diffusion</a:t>
             </a:r>
-            <a:endParaRPr lang="en-US" sz="1200" dirty="0"/>
+            <a:endParaRPr lang="en-US" sz="1400" dirty="0"/>
           </a:p>
         </p:txBody>
       </p:sp>
@@ -7959,99 +7880,97 @@
           <a:ln/>
         </p:spPr>
         <p:txBody>
-          <a:bodyPr wrap="square" lIns="0" tIns="0" rIns="0" bIns="0" rtlCol="0" anchor="t">
-            <a:normAutofit/>
-          </a:bodyPr>
-          <a:lstStyle/>
-          <a:p>
-            <a:pPr marL="228600" indent="-228600">
+          <a:bodyPr wrap="square" lIns="0" tIns="0" rIns="0" bIns="0" rtlCol="0" anchor="t"/>
+          <a:lstStyle/>
+          <a:p>
+            <a:pPr marL="304800" indent="-304800">
               <a:spcAft>
-                <a:spcPts val="600"/>
+                <a:spcPts val="800"/>
               </a:spcAft>
               <a:buSzPct val="100000"/>
               <a:buChar char="•"/>
             </a:pPr>
             <a:r>
-              <a:rPr lang="en-US" sz="1600" dirty="0">
+              <a:rPr lang="en-US" sz="1800" dirty="0">
                 <a:solidFill>
                   <a:srgbClr val="141B26"/>
                 </a:solidFill>
               </a:rPr>
               <a:t>In the light, photosynthesis uses up carbon dioxide inside the leaf, so its concentration falls.</a:t>
             </a:r>
-            <a:endParaRPr lang="en-US" sz="1700" dirty="0"/>
-          </a:p>
-          <a:p>
-            <a:pPr marL="228600" indent="-228600">
+            <a:endParaRPr lang="en-US" sz="1800" dirty="0"/>
+          </a:p>
+          <a:p>
+            <a:pPr marL="304800" indent="-304800">
               <a:spcAft>
-                <a:spcPts val="600"/>
+                <a:spcPts val="800"/>
               </a:spcAft>
               <a:buSzPct val="100000"/>
               <a:buChar char="•"/>
             </a:pPr>
             <a:r>
-              <a:rPr lang="en-US" sz="1600" dirty="0">
+              <a:rPr lang="en-US" sz="1800" dirty="0">
                 <a:solidFill>
                   <a:srgbClr val="141B26"/>
                 </a:solidFill>
               </a:rPr>
               <a:t>Carbon dioxide diffuses in from the air through open stomata.</a:t>
             </a:r>
-            <a:endParaRPr lang="en-US" sz="1700" dirty="0"/>
-          </a:p>
-          <a:p>
-            <a:pPr marL="228600" indent="-228600">
+            <a:endParaRPr lang="en-US" sz="1800" dirty="0"/>
+          </a:p>
+          <a:p>
+            <a:pPr marL="304800" indent="-304800">
               <a:spcAft>
-                <a:spcPts val="600"/>
+                <a:spcPts val="800"/>
               </a:spcAft>
               <a:buSzPct val="100000"/>
               <a:buChar char="•"/>
             </a:pPr>
             <a:r>
-              <a:rPr lang="en-US" sz="1600" dirty="0">
+              <a:rPr lang="en-US" sz="1800" dirty="0">
                 <a:solidFill>
                   <a:srgbClr val="141B26"/>
                 </a:solidFill>
               </a:rPr>
               <a:t>Oxygen made by photosynthesis builds up and diffuses out.</a:t>
             </a:r>
-            <a:endParaRPr lang="en-US" sz="1700" dirty="0"/>
-          </a:p>
-          <a:p>
-            <a:pPr marL="228600" indent="-228600">
+            <a:endParaRPr lang="en-US" sz="1800" dirty="0"/>
+          </a:p>
+          <a:p>
+            <a:pPr marL="304800" indent="-304800">
               <a:spcAft>
-                <a:spcPts val="600"/>
+                <a:spcPts val="800"/>
               </a:spcAft>
               <a:buSzPct val="100000"/>
               <a:buChar char="•"/>
             </a:pPr>
             <a:r>
-              <a:rPr lang="en-US" sz="1600" dirty="0">
+              <a:rPr lang="en-US" sz="1800" dirty="0">
                 <a:solidFill>
                   <a:srgbClr val="141B26"/>
                 </a:solidFill>
               </a:rPr>
               <a:t>Leaves are thin, so gases do not have to diffuse far to reach every cell.</a:t>
             </a:r>
-            <a:endParaRPr lang="en-US" sz="1700" dirty="0"/>
-          </a:p>
-          <a:p>
-            <a:pPr marL="228600" indent="-228600">
+            <a:endParaRPr lang="en-US" sz="1800" dirty="0"/>
+          </a:p>
+          <a:p>
+            <a:pPr marL="304800" indent="-304800">
               <a:spcAft>
-                <a:spcPts val="600"/>
+                <a:spcPts val="800"/>
               </a:spcAft>
               <a:buSzPct val="100000"/>
               <a:buChar char="•"/>
             </a:pPr>
             <a:r>
-              <a:rPr lang="en-US" sz="1600" dirty="0">
+              <a:rPr lang="en-US" sz="1800" dirty="0">
                 <a:solidFill>
                   <a:srgbClr val="141B26"/>
                 </a:solidFill>
               </a:rPr>
               <a:t>This swapping of gases is gas exchange.</a:t>
             </a:r>
-            <a:endParaRPr lang="en-US" sz="1700" dirty="0"/>
+            <a:endParaRPr lang="en-US" sz="1800" dirty="0"/>
           </a:p>
         </p:txBody>
       </p:sp>
@@ -8071,8 +7990,8 @@
         </p:blipFill>
         <p:spPr>
           <a:xfrm>
-            <a:off x="5069840" y="1280160"/>
-            <a:ext cx="6502400" cy="3657600"/>
+            <a:off x="5029200" y="1549451"/>
+            <a:ext cx="6583680" cy="3119018"/>
           </a:xfrm>
           <a:prstGeom prst="rect">
             <a:avLst/>
@@ -8122,16 +8041,14 @@
           <a:ln/>
         </p:spPr>
         <p:txBody>
-          <a:bodyPr wrap="square" lIns="0" tIns="0" rIns="0" bIns="0" rtlCol="0" anchor="ctr">
-            <a:normAutofit/>
-          </a:bodyPr>
+          <a:bodyPr wrap="square" lIns="0" tIns="0" rIns="0" bIns="0" rtlCol="0" anchor="ctr"/>
           <a:lstStyle/>
           <a:p>
             <a:pPr indent="0" marL="0">
               <a:buNone/>
             </a:pPr>
             <a:r>
-              <a:rPr lang="en-US" sz="1400" b="1" dirty="0">
+              <a:rPr lang="en-US" sz="1700" b="1" dirty="0">
                 <a:solidFill>
                   <a:srgbClr val="7B3A8E"/>
                 </a:solidFill>
@@ -8142,14 +8059,14 @@
               <a:buNone/>
             </a:pPr>
             <a:r>
-              <a:rPr lang="en-US" sz="1400" dirty="0">
+              <a:rPr lang="en-US" sz="1700" dirty="0">
                 <a:solidFill>
                   <a:srgbClr val="141B26"/>
                 </a:solidFill>
               </a:rPr>
               <a:t>Photosynthesis keeps the carbon dioxide concentration inside the leaf low, so carbon dioxide keeps diffusing in.</a:t>
             </a:r>
-            <a:endParaRPr lang="en-US" sz="1400" dirty="0"/>
+            <a:endParaRPr lang="en-US" sz="1700" dirty="0"/>
           </a:p>
         </p:txBody>
       </p:sp>
@@ -8332,8 +8249,8 @@
         </p:nvSpPr>
         <p:spPr>
           <a:xfrm>
-            <a:off x="548640" y="6053328"/>
-            <a:ext cx="9601200" cy="292608"/>
+            <a:off x="548640" y="6035040"/>
+            <a:ext cx="9601200" cy="310896"/>
           </a:xfrm>
           <a:prstGeom prst="rect">
             <a:avLst/>
@@ -8349,7 +8266,7 @@
               <a:buNone/>
             </a:pPr>
             <a:r>
-              <a:rPr lang="en-US" sz="1200" b="1" dirty="0">
+              <a:rPr lang="en-US" sz="1400" b="1" dirty="0">
                 <a:solidFill>
                   <a:srgbClr val="7B3A8E"/>
                 </a:solidFill>
@@ -8360,14 +8277,14 @@
               <a:buNone/>
             </a:pPr>
             <a:r>
-              <a:rPr lang="en-US" sz="1200" dirty="0">
+              <a:rPr lang="en-US" sz="1400" dirty="0">
                 <a:solidFill>
                   <a:srgbClr val="7B3A8E"/>
                 </a:solidFill>
               </a:rPr>
               <a:t>water vapour   ·   evaporation   ·   wilt</a:t>
             </a:r>
-            <a:endParaRPr lang="en-US" sz="1200" dirty="0"/>
+            <a:endParaRPr lang="en-US" sz="1400" dirty="0"/>
           </a:p>
         </p:txBody>
       </p:sp>
@@ -8389,81 +8306,79 @@
           <a:ln/>
         </p:spPr>
         <p:txBody>
-          <a:bodyPr wrap="square" lIns="0" tIns="0" rIns="0" bIns="0" rtlCol="0" anchor="t">
-            <a:normAutofit/>
-          </a:bodyPr>
-          <a:lstStyle/>
-          <a:p>
-            <a:pPr marL="228600" indent="-228600">
+          <a:bodyPr wrap="square" lIns="0" tIns="0" rIns="0" bIns="0" rtlCol="0" anchor="t"/>
+          <a:lstStyle/>
+          <a:p>
+            <a:pPr marL="304800" indent="-304800">
               <a:spcAft>
-                <a:spcPts val="600"/>
+                <a:spcPts val="800"/>
               </a:spcAft>
               <a:buSzPct val="100000"/>
               <a:buChar char="•"/>
             </a:pPr>
             <a:r>
-              <a:rPr lang="en-US" sz="1700" dirty="0">
+              <a:rPr lang="en-US" sz="2000" dirty="0">
                 <a:solidFill>
                   <a:srgbClr val="141B26"/>
                 </a:solidFill>
               </a:rPr>
               <a:t>Water evaporates from the cells inside the leaf.</a:t>
             </a:r>
-            <a:endParaRPr lang="en-US" sz="1700" dirty="0"/>
-          </a:p>
-          <a:p>
-            <a:pPr marL="228600" indent="-228600">
+            <a:endParaRPr lang="en-US" sz="2000" dirty="0"/>
+          </a:p>
+          <a:p>
+            <a:pPr marL="304800" indent="-304800">
               <a:spcAft>
-                <a:spcPts val="600"/>
+                <a:spcPts val="800"/>
               </a:spcAft>
               <a:buSzPct val="100000"/>
               <a:buChar char="•"/>
             </a:pPr>
             <a:r>
-              <a:rPr lang="en-US" sz="1700" dirty="0">
+              <a:rPr lang="en-US" sz="2000" dirty="0">
                 <a:solidFill>
                   <a:srgbClr val="141B26"/>
                 </a:solidFill>
               </a:rPr>
               <a:t>Water vapour diffuses out through open stomata.</a:t>
             </a:r>
-            <a:endParaRPr lang="en-US" sz="1700" dirty="0"/>
-          </a:p>
-          <a:p>
-            <a:pPr marL="228600" indent="-228600">
+            <a:endParaRPr lang="en-US" sz="2000" dirty="0"/>
+          </a:p>
+          <a:p>
+            <a:pPr marL="304800" indent="-304800">
               <a:spcAft>
-                <a:spcPts val="600"/>
+                <a:spcPts val="800"/>
               </a:spcAft>
               <a:buSzPct val="100000"/>
               <a:buChar char="•"/>
             </a:pPr>
             <a:r>
-              <a:rPr lang="en-US" sz="1700" dirty="0">
+              <a:rPr lang="en-US" sz="2000" dirty="0">
                 <a:solidFill>
                   <a:srgbClr val="141B26"/>
                 </a:solidFill>
               </a:rPr>
               <a:t>This is faster when it is hot (particles move faster) and when the air outside is dry or windy (bigger concentration difference).</a:t>
             </a:r>
-            <a:endParaRPr lang="en-US" sz="1700" dirty="0"/>
-          </a:p>
-          <a:p>
-            <a:pPr marL="228600" indent="-228600">
+            <a:endParaRPr lang="en-US" sz="2000" dirty="0"/>
+          </a:p>
+          <a:p>
+            <a:pPr marL="304800" indent="-304800">
               <a:spcAft>
-                <a:spcPts val="600"/>
+                <a:spcPts val="800"/>
               </a:spcAft>
               <a:buSzPct val="100000"/>
               <a:buChar char="•"/>
             </a:pPr>
             <a:r>
-              <a:rPr lang="en-US" sz="1700" dirty="0">
+              <a:rPr lang="en-US" sz="2000" dirty="0">
                 <a:solidFill>
                   <a:srgbClr val="141B26"/>
                 </a:solidFill>
               </a:rPr>
               <a:t>If the roots cannot replace the water, the cells sag and the plant wilts.</a:t>
             </a:r>
-            <a:endParaRPr lang="en-US" sz="1700" dirty="0"/>
+            <a:endParaRPr lang="en-US" sz="2000" dirty="0"/>
           </a:p>
         </p:txBody>
       </p:sp>
@@ -8510,16 +8425,14 @@
           <a:ln/>
         </p:spPr>
         <p:txBody>
-          <a:bodyPr wrap="square" lIns="0" tIns="0" rIns="0" bIns="0" rtlCol="0" anchor="ctr">
-            <a:normAutofit/>
-          </a:bodyPr>
+          <a:bodyPr wrap="square" lIns="0" tIns="0" rIns="0" bIns="0" rtlCol="0" anchor="ctr"/>
           <a:lstStyle/>
           <a:p>
             <a:pPr indent="0" marL="0">
               <a:buNone/>
             </a:pPr>
             <a:r>
-              <a:rPr lang="en-US" sz="1400" b="1" dirty="0">
+              <a:rPr lang="en-US" sz="1700" b="1" dirty="0">
                 <a:solidFill>
                   <a:srgbClr val="7B3A8E"/>
                 </a:solidFill>
@@ -8530,14 +8443,14 @@
               <a:buNone/>
             </a:pPr>
             <a:r>
-              <a:rPr lang="en-US" sz="1400" dirty="0">
+              <a:rPr lang="en-US" sz="1700" dirty="0">
                 <a:solidFill>
                   <a:srgbClr val="141B26"/>
                 </a:solidFill>
               </a:rPr>
               <a:t>Open stomata let carbon dioxide in but water out. Closing them at night saves water.</a:t>
             </a:r>
-            <a:endParaRPr lang="en-US" sz="1400" dirty="0"/>
+            <a:endParaRPr lang="en-US" sz="1700" dirty="0"/>
           </a:p>
         </p:txBody>
       </p:sp>
@@ -8737,14 +8650,14 @@
               <a:buNone/>
             </a:pPr>
             <a:r>
-              <a:rPr lang="en-US" sz="1400" i="1" dirty="0">
+              <a:rPr lang="en-US" sz="1600" i="1" dirty="0">
                 <a:solidFill>
                   <a:srgbClr val="5B6574"/>
                 </a:solidFill>
               </a:rPr>
               <a:t>Mini whiteboards. One answer each, then we check.</a:t>
             </a:r>
-            <a:endParaRPr lang="en-US" sz="1400" dirty="0"/>
+            <a:endParaRPr lang="en-US" sz="1600" dirty="0"/>
           </a:p>
         </p:txBody>
       </p:sp>
@@ -8793,16 +8706,14 @@
           <a:ln/>
         </p:spPr>
         <p:txBody>
-          <a:bodyPr wrap="square" lIns="0" tIns="0" rIns="0" bIns="0" rtlCol="0" anchor="ctr">
-            <a:normAutofit/>
-          </a:bodyPr>
+          <a:bodyPr wrap="square" lIns="0" tIns="0" rIns="0" bIns="0" rtlCol="0" anchor="ctr"/>
           <a:lstStyle/>
           <a:p>
             <a:pPr indent="0" marL="0">
               <a:buNone/>
             </a:pPr>
             <a:r>
-              <a:rPr lang="en-US" sz="1600" b="1" dirty="0">
+              <a:rPr lang="en-US" sz="2000" b="1" dirty="0">
                 <a:solidFill>
                   <a:srgbClr val="7B3A8E"/>
                 </a:solidFill>
@@ -8813,14 +8724,14 @@
               <a:buNone/>
             </a:pPr>
             <a:r>
-              <a:rPr lang="en-US" sz="1600" dirty="0">
+              <a:rPr lang="en-US" sz="2000" dirty="0">
                 <a:solidFill>
                   <a:srgbClr val="141B26"/>
                 </a:solidFill>
               </a:rPr>
               <a:t>Which cells open and close a stoma?</a:t>
             </a:r>
-            <a:endParaRPr lang="en-US" sz="1600" dirty="0"/>
+            <a:endParaRPr lang="en-US" sz="2000" dirty="0"/>
           </a:p>
         </p:txBody>
       </p:sp>
@@ -8869,16 +8780,14 @@
           <a:ln/>
         </p:spPr>
         <p:txBody>
-          <a:bodyPr wrap="square" lIns="0" tIns="0" rIns="0" bIns="0" rtlCol="0" anchor="ctr">
-            <a:normAutofit/>
-          </a:bodyPr>
+          <a:bodyPr wrap="square" lIns="0" tIns="0" rIns="0" bIns="0" rtlCol="0" anchor="ctr"/>
           <a:lstStyle/>
           <a:p>
             <a:pPr indent="0" marL="0">
               <a:buNone/>
             </a:pPr>
             <a:r>
-              <a:rPr lang="en-US" sz="1600" b="1" dirty="0">
+              <a:rPr lang="en-US" sz="2000" b="1" dirty="0">
                 <a:solidFill>
                   <a:srgbClr val="7B3A8E"/>
                 </a:solidFill>
@@ -8889,14 +8798,14 @@
               <a:buNone/>
             </a:pPr>
             <a:r>
-              <a:rPr lang="en-US" sz="1600" dirty="0">
+              <a:rPr lang="en-US" sz="2000" dirty="0">
                 <a:solidFill>
                   <a:srgbClr val="141B26"/>
                 </a:solidFill>
               </a:rPr>
               <a:t>Is a stoma usually open or shut at night?</a:t>
             </a:r>
-            <a:endParaRPr lang="en-US" sz="1600" dirty="0"/>
+            <a:endParaRPr lang="en-US" sz="2000" dirty="0"/>
           </a:p>
         </p:txBody>
       </p:sp>
@@ -8945,16 +8854,14 @@
           <a:ln/>
         </p:spPr>
         <p:txBody>
-          <a:bodyPr wrap="square" lIns="0" tIns="0" rIns="0" bIns="0" rtlCol="0" anchor="ctr">
-            <a:normAutofit/>
-          </a:bodyPr>
+          <a:bodyPr wrap="square" lIns="0" tIns="0" rIns="0" bIns="0" rtlCol="0" anchor="ctr"/>
           <a:lstStyle/>
           <a:p>
             <a:pPr indent="0" marL="0">
               <a:buNone/>
             </a:pPr>
             <a:r>
-              <a:rPr lang="en-US" sz="1600" b="1" dirty="0">
+              <a:rPr lang="en-US" sz="2000" b="1" dirty="0">
                 <a:solidFill>
                   <a:srgbClr val="7B3A8E"/>
                 </a:solidFill>
@@ -8965,14 +8872,14 @@
               <a:buNone/>
             </a:pPr>
             <a:r>
-              <a:rPr lang="en-US" sz="1600" dirty="0">
+              <a:rPr lang="en-US" sz="2000" dirty="0">
                 <a:solidFill>
                   <a:srgbClr val="141B26"/>
                 </a:solidFill>
               </a:rPr>
               <a:t>Diffusion: from low to high concentration, or high to low?</a:t>
             </a:r>
-            <a:endParaRPr lang="en-US" sz="1600" dirty="0"/>
+            <a:endParaRPr lang="en-US" sz="2000" dirty="0"/>
           </a:p>
         </p:txBody>
       </p:sp>
@@ -9021,16 +8928,14 @@
           <a:ln/>
         </p:spPr>
         <p:txBody>
-          <a:bodyPr wrap="square" lIns="0" tIns="0" rIns="0" bIns="0" rtlCol="0" anchor="ctr">
-            <a:normAutofit/>
-          </a:bodyPr>
+          <a:bodyPr wrap="square" lIns="0" tIns="0" rIns="0" bIns="0" rtlCol="0" anchor="ctr"/>
           <a:lstStyle/>
           <a:p>
             <a:pPr indent="0" marL="0">
               <a:buNone/>
             </a:pPr>
             <a:r>
-              <a:rPr lang="en-US" sz="1600" b="1" dirty="0">
+              <a:rPr lang="en-US" sz="2000" b="1" dirty="0">
                 <a:solidFill>
                   <a:srgbClr val="7B3A8E"/>
                 </a:solidFill>
@@ -9041,14 +8946,14 @@
               <a:buNone/>
             </a:pPr>
             <a:r>
-              <a:rPr lang="en-US" sz="1600" dirty="0">
+              <a:rPr lang="en-US" sz="2000" dirty="0">
                 <a:solidFill>
                   <a:srgbClr val="141B26"/>
                 </a:solidFill>
               </a:rPr>
               <a:t>Name two things that make diffusion faster.</a:t>
             </a:r>
-            <a:endParaRPr lang="en-US" sz="1600" dirty="0"/>
+            <a:endParaRPr lang="en-US" sz="2000" dirty="0"/>
           </a:p>
         </p:txBody>
       </p:sp>
@@ -9097,16 +9002,14 @@
           <a:ln/>
         </p:spPr>
         <p:txBody>
-          <a:bodyPr wrap="square" lIns="0" tIns="0" rIns="0" bIns="0" rtlCol="0" anchor="ctr">
-            <a:normAutofit/>
-          </a:bodyPr>
+          <a:bodyPr wrap="square" lIns="0" tIns="0" rIns="0" bIns="0" rtlCol="0" anchor="ctr"/>
           <a:lstStyle/>
           <a:p>
             <a:pPr indent="0" marL="0">
               <a:buNone/>
             </a:pPr>
             <a:r>
-              <a:rPr lang="en-US" sz="1600" b="1" dirty="0">
+              <a:rPr lang="en-US" sz="2000" b="1" dirty="0">
                 <a:solidFill>
                   <a:srgbClr val="7B3A8E"/>
                 </a:solidFill>
@@ -9117,14 +9020,14 @@
               <a:buNone/>
             </a:pPr>
             <a:r>
-              <a:rPr lang="en-US" sz="1600" dirty="0">
+              <a:rPr lang="en-US" sz="2000" dirty="0">
                 <a:solidFill>
                   <a:srgbClr val="141B26"/>
                 </a:solidFill>
               </a:rPr>
               <a:t>In the light, which gas diffuses INTO a leaf?</a:t>
             </a:r>
-            <a:endParaRPr lang="en-US" sz="1600" dirty="0"/>
+            <a:endParaRPr lang="en-US" sz="2000" dirty="0"/>
           </a:p>
         </p:txBody>
       </p:sp>
